--- a/docs/devops/ForgeFlow_CA2_DevOps_Presentation.pptx
+++ b/docs/devops/ForgeFlow_CA2_DevOps_Presentation.pptx
@@ -4,6 +4,9 @@
   <p:sldMasterIdLst>
     <p:sldMasterId id="2147483648" r:id="rId1"/>
   </p:sldMasterIdLst>
+  <p:notesMasterIdLst>
+    <p:notesMasterId r:id="rId9"/>
+  </p:notesMasterIdLst>
   <p:sldIdLst>
     <p:sldId id="256" r:id="rId2"/>
     <p:sldId id="257" r:id="rId3"/>
@@ -13,9 +16,6 @@
     <p:sldId id="261" r:id="rId7"/>
     <p:sldId id="262" r:id="rId8"/>
   </p:sldIdLst>
-  <p:notesMasterIdLst>
-    <p:notesMasterId r:id="rId9"/>
-  </p:notesMasterIdLst>
   <p:sldSz cx="12192000" cy="6858000"/>
   <p:notesSz cx="6858000" cy="12192000"/>
   <p:defaultTextStyle>
@@ -110,6 +110,11 @@
       </a:defRPr>
     </a:lvl9pPr>
   </p:defaultTextStyle>
+  <p:extLst>
+    <p:ext uri="{EFAFB233-063F-42B5-8137-9DF3F51BA10A}">
+      <p15:sldGuideLst xmlns:p15="http://schemas.microsoft.com/office/powerpoint/2012/main"/>
+    </p:ext>
+  </p:extLst>
 </p:presentation>
 </file>
 
@@ -135,234 +140,10 @@
           <a:chExt cx="0" cy="0"/>
         </a:xfrm>
       </p:grpSpPr>
-      <p:sp>
-        <p:nvSpPr>
-          <p:cNvPr id="2" name="Header Placeholder 1"/>
-          <p:cNvSpPr>
-            <a:spLocks noGrp="1"/>
-          </p:cNvSpPr>
-          <p:nvPr>
-            <p:ph type="hdr" sz="quarter"/>
-          </p:nvPr>
-        </p:nvSpPr>
-        <p:spPr>
-          <a:xfrm>
-            <a:off x="0" y="0"/>
-            <a:ext cx="2971800" cy="458788"/>
-          </a:xfrm>
-          <a:prstGeom prst="rect">
-            <a:avLst/>
-          </a:prstGeom>
-        </p:spPr>
-        <p:txBody>
-          <a:bodyPr vert="horz" lIns="91440" tIns="45720" rIns="91440" bIns="45720" rtlCol="0"/>
-          <a:lstStyle>
-            <a:lvl1pPr algn="l">
-              <a:defRPr sz="1200"/>
-            </a:lvl1pPr>
-          </a:lstStyle>
-          <a:p>
-            <a:endParaRPr lang="en-US"/>
-          </a:p>
-        </p:txBody>
-      </p:sp>
-      <p:sp>
-        <p:nvSpPr>
-          <p:cNvPr id="3" name="Date Placeholder 2"/>
-          <p:cNvSpPr>
-            <a:spLocks noGrp="1"/>
-          </p:cNvSpPr>
-          <p:nvPr>
-            <p:ph type="dt" idx="1"/>
-          </p:nvPr>
-        </p:nvSpPr>
-        <p:spPr>
-          <a:xfrm>
-            <a:off x="3884613" y="0"/>
-            <a:ext cx="2971800" cy="458788"/>
-          </a:xfrm>
-          <a:prstGeom prst="rect">
-            <a:avLst/>
-          </a:prstGeom>
-        </p:spPr>
-        <p:txBody>
-          <a:bodyPr vert="horz" lIns="91440" tIns="45720" rIns="91440" bIns="45720" rtlCol="0"/>
-          <a:lstStyle>
-            <a:lvl1pPr algn="r">
-              <a:defRPr sz="1200"/>
-            </a:lvl1pPr>
-          </a:lstStyle>
-          <a:p>
-            <a:fld id="{5282F153-3F37-0F45-9E97-73ACFA13230C}" type="datetimeFigureOut">
-              <a:rPr lang="en-US"/>
-              <a:t>7/23/19</a:t>
-            </a:fld>
-            <a:endParaRPr lang="en-US"/>
-          </a:p>
-        </p:txBody>
-      </p:sp>
-      <p:sp>
-        <p:nvSpPr>
-          <p:cNvPr id="4" name="Slide Image Placeholder 3"/>
-          <p:cNvSpPr>
-            <a:spLocks noGrp="1" noRot="1" noChangeAspect="1"/>
-          </p:cNvSpPr>
-          <p:nvPr>
-            <p:ph type="sldImg" idx="2"/>
-          </p:nvPr>
-        </p:nvSpPr>
-        <p:spPr>
-          <a:xfrm>
-            <a:off x="685800" y="1143000"/>
-            <a:ext cx="5486400" cy="3086100"/>
-          </a:xfrm>
-          <a:prstGeom prst="rect">
-            <a:avLst/>
-          </a:prstGeom>
-          <a:noFill/>
-          <a:ln w="12700">
-            <a:solidFill>
-              <a:prstClr val="black"/>
-            </a:solidFill>
-          </a:ln>
-        </p:spPr>
-        <p:txBody>
-          <a:bodyPr vert="horz" lIns="91440" tIns="45720" rIns="91440" bIns="45720" rtlCol="0" anchor="ctr"/>
-          <a:lstStyle/>
-          <a:p>
-            <a:endParaRPr lang="en-US"/>
-          </a:p>
-        </p:txBody>
-      </p:sp>
-      <p:sp>
-        <p:nvSpPr>
-          <p:cNvPr id="5" name="Notes Placeholder 4"/>
-          <p:cNvSpPr>
-            <a:spLocks noGrp="1"/>
-          </p:cNvSpPr>
-          <p:nvPr>
-            <p:ph type="body" sz="quarter" idx="3"/>
-          </p:nvPr>
-        </p:nvSpPr>
-        <p:spPr>
-          <a:xfrm>
-            <a:off x="685800" y="4400550"/>
-            <a:ext cx="5486400" cy="3600450"/>
-          </a:xfrm>
-          <a:prstGeom prst="rect">
-            <a:avLst/>
-          </a:prstGeom>
-        </p:spPr>
-        <p:txBody>
-          <a:bodyPr vert="horz" lIns="91440" tIns="45720" rIns="91440" bIns="45720" rtlCol="0"/>
-          <a:lstStyle/>
-          <a:p>
-            <a:pPr lvl="0"/>
-            <a:r>
-              <a:rPr lang="en-US"/>
-              <a:t>Click to edit Master text styles</a:t>
-            </a:r>
-          </a:p>
-          <a:p>
-            <a:pPr lvl="1"/>
-            <a:r>
-              <a:rPr lang="en-US"/>
-              <a:t>Second level</a:t>
-            </a:r>
-          </a:p>
-          <a:p>
-            <a:pPr lvl="2"/>
-            <a:r>
-              <a:rPr lang="en-US"/>
-              <a:t>Third level</a:t>
-            </a:r>
-          </a:p>
-          <a:p>
-            <a:pPr lvl="3"/>
-            <a:r>
-              <a:rPr lang="en-US"/>
-              <a:t>Fourth level</a:t>
-            </a:r>
-          </a:p>
-          <a:p>
-            <a:pPr lvl="4"/>
-            <a:r>
-              <a:rPr lang="en-US"/>
-              <a:t>Fifth level</a:t>
-            </a:r>
-          </a:p>
-        </p:txBody>
-      </p:sp>
-      <p:sp>
-        <p:nvSpPr>
-          <p:cNvPr id="6" name="Footer Placeholder 5"/>
-          <p:cNvSpPr>
-            <a:spLocks noGrp="1"/>
-          </p:cNvSpPr>
-          <p:nvPr>
-            <p:ph type="ftr" sz="quarter" idx="4"/>
-          </p:nvPr>
-        </p:nvSpPr>
-        <p:spPr>
-          <a:xfrm>
-            <a:off x="0" y="8685213"/>
-            <a:ext cx="2971800" cy="458787"/>
-          </a:xfrm>
-          <a:prstGeom prst="rect">
-            <a:avLst/>
-          </a:prstGeom>
-        </p:spPr>
-        <p:txBody>
-          <a:bodyPr vert="horz" lIns="91440" tIns="45720" rIns="91440" bIns="45720" rtlCol="0" anchor="b"/>
-          <a:lstStyle>
-            <a:lvl1pPr algn="l">
-              <a:defRPr sz="1200"/>
-            </a:lvl1pPr>
-          </a:lstStyle>
-          <a:p>
-            <a:endParaRPr lang="en-US"/>
-          </a:p>
-        </p:txBody>
-      </p:sp>
-      <p:sp>
-        <p:nvSpPr>
-          <p:cNvPr id="7" name="Slide Number Placeholder 6"/>
-          <p:cNvSpPr>
-            <a:spLocks noGrp="1"/>
-          </p:cNvSpPr>
-          <p:nvPr>
-            <p:ph type="sldNum" sz="quarter" idx="5"/>
-          </p:nvPr>
-        </p:nvSpPr>
-        <p:spPr>
-          <a:xfrm>
-            <a:off x="3884613" y="8685213"/>
-            <a:ext cx="2971800" cy="458787"/>
-          </a:xfrm>
-          <a:prstGeom prst="rect">
-            <a:avLst/>
-          </a:prstGeom>
-        </p:spPr>
-        <p:txBody>
-          <a:bodyPr vert="horz" lIns="91440" tIns="45720" rIns="91440" bIns="45720" rtlCol="0" anchor="b"/>
-          <a:lstStyle>
-            <a:lvl1pPr algn="r">
-              <a:defRPr sz="1200"/>
-            </a:lvl1pPr>
-          </a:lstStyle>
-          <a:p>
-            <a:fld id="{CE5E9CC1-C706-0F49-92D6-E571CC5EEA8F}" type="slidenum">
-              <a:rPr lang="en-US"/>
-              <a:t>‹#›</a:t>
-            </a:fld>
-            <a:endParaRPr lang="en-US"/>
-          </a:p>
-        </p:txBody>
-      </p:sp>
     </p:spTree>
     <p:extLst>
       <p:ext uri="{BB962C8B-B14F-4D97-AF65-F5344CB8AC3E}">
-        <p14:creationId xmlns:p14="http://schemas.microsoft.com/office/powerpoint/2010/main" val="1024086991"/>
+        <p14:creationId xmlns:p14="http://schemas.microsoft.com/office/powerpoint/2010/main" val="1898801624"/>
       </p:ext>
     </p:extLst>
   </p:cSld>
@@ -510,7 +291,6 @@
               <a:rPr lang="en-US" dirty="0"/>
               <a:t>Title slide. CA-2 DevOps for ForgeFlow, Group 04. ForgeFlow takes a web-app idea through requirements, design, build, test with self-healing repair, deploy and live validation. This deck covers how ForgeFlow itself is delivered: CI/CD with GitHub Actions, Ansible, Docker and k3s, and Prometheus/Grafana monitoring on an Oracle Cloud VM with 3 OCPU and 16 GB RAM.</a:t>
             </a:r>
-            <a:endParaRPr lang="en-US" dirty="0"/>
           </a:p>
         </p:txBody>
       </p:sp>
@@ -598,7 +378,6 @@
               <a:rPr lang="en-US" dirty="0"/>
               <a:t>Architecture. GitHub Actions builds a multi-arch image into GHCR and deploys it to the Oracle Ampere VM (3 OCPU, 16 GB) over SSH; Vercel serves the PWA. On the VM nginx terminates TLS and forwards to the Docker Compose production stack: api, two MongoDB instances, the Caddy preview proxy and per-project sandboxes. k3s and the monitoring stack run alongside. Production stays on Compose because sandbox previews are routed by Docker container name, which a Kubernetes pod cannot resolve.</a:t>
             </a:r>
-            <a:endParaRPr lang="en-US" dirty="0"/>
           </a:p>
         </p:txBody>
       </p:sp>
@@ -686,7 +465,6 @@
               <a:rPr lang="en-US" dirty="0"/>
               <a:t>Pipeline. CI runs backend lint, types and 1,648 tests; frontend lint, types, tests, build and PWA check; a sandbox image smoke test; gitleaks and dependency audits; a config guard; and the generated-app skeleton with Playwright. Only if all are green does CD run: it resolves the tested commit, builds arm64 and amd64 images, pushes SHA tags to GHCR, records the running image, deploys over SSH, polls health for up to 150 seconds and rolls back automatically if unhealthy. It then verifies the public HTTPS endpoint and finally deploys the frontend to Vercel.</a:t>
             </a:r>
-            <a:endParaRPr lang="en-US" dirty="0"/>
           </a:p>
         </p:txBody>
       </p:sp>
@@ -774,7 +552,6 @@
               <a:rPr lang="en-US" dirty="0"/>
               <a:t>Challenges. The WebSocket case: we tested the exact request against real nginx with and without the three upgrade lines; without them the handshake silently degrades to 200 OK. Oracle firewalls: the hidden iptables REJECT rule overrides ufw; the Ansible role removes it by specification and purges iptables-persistent. The five smaller bugs were all found by sending real requests or running real queries, not by linting.</a:t>
             </a:r>
-            <a:endParaRPr lang="en-US" dirty="0"/>
           </a:p>
         </p:txBody>
       </p:sp>
@@ -862,7 +639,6 @@
               <a:rPr lang="en-US" dirty="0"/>
               <a:t>Lessons learned. Validation by execution found five bugs no linter caught. Zero downtime is a measured number: 807 requests and zero failures. Every deploy waits on a health signal, which is what makes rollback possible. Dangerous operations such as regenerating the Fernet key are prevented by design, and the automation is additive on a VM that is shared with another project.</a:t>
             </a:r>
-            <a:endParaRPr lang="en-US" dirty="0"/>
           </a:p>
         </p:txBody>
       </p:sp>
@@ -950,7 +726,6 @@
               <a:rPr lang="en-US" dirty="0"/>
               <a:t>Verified results. Every configuration was executed: actionlint, kubeconform, ansible-lint, promtool, nginx -t, a live WebSocket handshake, the production image, a real k3s rolling update with 807 requests and zero failures, an automatic rollback of a broken release, five of five Prometheus targets up, a provisioned 16-panel dashboard and 1,648 passing backend tests.</a:t>
             </a:r>
-            <a:endParaRPr lang="en-US" dirty="0"/>
           </a:p>
         </p:txBody>
       </p:sp>
@@ -1038,7 +813,6 @@
               <a:rPr lang="en-US" dirty="0"/>
               <a:t>Bonus. We entered ForgeFlow in the IBM Bob 2.0 Hackathon on lablab.ai, an online 48-hour event from 25 to 27 September 2026 with a 12,000 dollar prize pool. Team: Faheemuddin Sayyed, Sanidhya Awasthi and Raghav Sonchhatra. Our submission, Forgeflow, turns a web-app idea into a verified live URL with a bounded, diff-aware repair loop.</a:t>
             </a:r>
-            <a:endParaRPr lang="en-US" dirty="0"/>
           </a:p>
         </p:txBody>
       </p:sp>
@@ -1111,6 +885,11 @@
 <file path=ppt/slideMasters/slideMaster1.xml><?xml version="1.0" encoding="utf-8"?>
 <p:sldMaster xmlns:a="http://schemas.openxmlformats.org/drawingml/2006/main" xmlns:r="http://schemas.openxmlformats.org/officeDocument/2006/relationships" xmlns:p="http://schemas.openxmlformats.org/presentationml/2006/main">
   <p:cSld>
+    <p:bg>
+      <p:bgRef idx="1001">
+        <a:schemeClr val="bg1"/>
+      </p:bgRef>
+    </p:bg>
     <p:spTree>
       <p:nvGrpSpPr>
         <p:cNvPr id="1" name=""/>
@@ -1393,6 +1172,7 @@
         <a:solidFill>
           <a:srgbClr val="FFFFFF"/>
         </a:solidFill>
+        <a:effectLst/>
       </p:bgPr>
     </p:bg>
     <p:spTree>
@@ -1438,14 +1218,14 @@
       </p:sp>
       <p:pic>
         <p:nvPicPr>
-          <p:cNvPr id="3" name="Image 0" descr="/home/user/ForgeFlow/presentation/sit-logo.png">    </p:cNvPr>
+          <p:cNvPr id="3" name="Image 0" descr="/home/user/ForgeFlow/presentation/sit-logo.png"/>
           <p:cNvPicPr>
             <a:picLocks noChangeAspect="1"/>
           </p:cNvPicPr>
           <p:nvPr/>
         </p:nvPicPr>
         <p:blipFill>
-          <a:blip r:embed="rId1"/>
+          <a:blip r:embed="rId3"/>
           <a:stretch>
             <a:fillRect/>
           </a:stretch>
@@ -1481,7 +1261,7 @@
           <a:bodyPr wrap="square" lIns="0" tIns="0" rIns="0" bIns="0" rtlCol="0" anchor="ctr"/>
           <a:lstStyle/>
           <a:p>
-            <a:pPr algn="ctr" indent="0" marL="0">
+            <a:pPr marL="0" indent="0" algn="ctr">
               <a:buNone/>
             </a:pPr>
             <a:r>
@@ -1520,7 +1300,7 @@
           <a:bodyPr wrap="square" lIns="0" tIns="0" rIns="0" bIns="0" rtlCol="0" anchor="ctr"/>
           <a:lstStyle/>
           <a:p>
-            <a:pPr algn="ctr" indent="0" marL="0">
+            <a:pPr marL="0" indent="0" algn="ctr">
               <a:buNone/>
             </a:pPr>
             <a:r>
@@ -1559,7 +1339,7 @@
           <a:bodyPr wrap="square" lIns="0" tIns="0" rIns="0" bIns="0" rtlCol="0" anchor="ctr"/>
           <a:lstStyle/>
           <a:p>
-            <a:pPr algn="ctr" indent="0" marL="0">
+            <a:pPr marL="0" indent="0" algn="ctr">
               <a:buNone/>
             </a:pPr>
             <a:r>
@@ -1579,30 +1359,33 @@
       </p:sp>
       <p:sp>
         <p:nvSpPr>
-          <p:cNvPr id="7" name="Text 4"/>
-          <p:cNvSpPr txBox="1"/>
-          <p:nvPr/>
-        </p:nvSpPr>
-        <p:spPr>
-          <a:xfrm>
-            <a:off x="548640" y="3584448"/>
-            <a:ext cx="11091672" cy="365760"/>
-          </a:xfrm>
-          <a:prstGeom prst="rect">
-            <a:avLst/>
-          </a:prstGeom>
-          <a:noFill/>
-          <a:ln/>
-        </p:spPr>
-        <p:txBody>
-          <a:bodyPr wrap="square" lIns="0" tIns="0" rIns="0" bIns="0" rtlCol="0" anchor="ctr"/>
-          <a:lstStyle/>
-          <a:p>
-            <a:pPr algn="ctr" indent="0" marL="0">
-              <a:buNone/>
-            </a:pPr>
-            <a:r>
-              <a:rPr lang="en-US" sz="1800" dirty="0">
+          <p:cNvPr id="8" name="Text 5"/>
+          <p:cNvSpPr txBox="1"/>
+          <p:nvPr/>
+        </p:nvSpPr>
+        <p:spPr>
+          <a:xfrm>
+            <a:off x="548640" y="4069079"/>
+            <a:ext cx="11091672" cy="1212047"/>
+          </a:xfrm>
+          <a:prstGeom prst="rect">
+            <a:avLst/>
+          </a:prstGeom>
+          <a:noFill/>
+          <a:ln/>
+        </p:spPr>
+        <p:txBody>
+          <a:bodyPr wrap="square" lIns="0" tIns="0" rIns="0" bIns="0" rtlCol="0" anchor="t"/>
+          <a:lstStyle/>
+          <a:p>
+            <a:pPr marL="0" indent="0" algn="ctr">
+              <a:lnSpc>
+                <a:spcPct val="115000"/>
+              </a:lnSpc>
+              <a:buNone/>
+            </a:pPr>
+            <a:r>
+              <a:rPr lang="en-US" sz="1600" dirty="0">
                 <a:solidFill>
                   <a:srgbClr val="1A1A1A"/>
                 </a:solidFill>
@@ -1610,34 +1393,12 @@
                 <a:ea typeface="Calibri" pitchFamily="34" charset="-122"/>
                 <a:cs typeface="Calibri" pitchFamily="34" charset="-120"/>
               </a:rPr>
-              <a:t>Group Number: Group – 04</a:t>
-            </a:r>
-            <a:endParaRPr lang="en-US" sz="1800" dirty="0"/>
-          </a:p>
-        </p:txBody>
-      </p:sp>
-      <p:sp>
-        <p:nvSpPr>
-          <p:cNvPr id="8" name="Text 5"/>
-          <p:cNvSpPr txBox="1"/>
-          <p:nvPr/>
-        </p:nvSpPr>
-        <p:spPr>
-          <a:xfrm>
-            <a:off x="548640" y="4069080"/>
-            <a:ext cx="11091672" cy="960120"/>
-          </a:xfrm>
-          <a:prstGeom prst="rect">
-            <a:avLst/>
-          </a:prstGeom>
-          <a:noFill/>
-          <a:ln/>
-        </p:spPr>
-        <p:txBody>
-          <a:bodyPr wrap="square" lIns="0" tIns="0" rIns="0" bIns="0" rtlCol="0" anchor="t"/>
-          <a:lstStyle/>
-          <a:p>
-            <a:pPr algn="ctr" indent="0" marL="0">
+              <a:t>Raghav Sonchhatra – PRN 23070122172</a:t>
+            </a:r>
+            <a:endParaRPr lang="en-US" sz="1600" dirty="0"/>
+          </a:p>
+          <a:p>
+            <a:pPr marL="0" indent="0" algn="ctr">
               <a:lnSpc>
                 <a:spcPct val="115000"/>
               </a:lnSpc>
@@ -1652,12 +1413,12 @@
                 <a:ea typeface="Calibri" pitchFamily="34" charset="-122"/>
                 <a:cs typeface="Calibri" pitchFamily="34" charset="-120"/>
               </a:rPr>
-              <a:t>Raghav Sonchhatra – PRN 23070122172</a:t>
+              <a:t>Sanidhya Awasthi – PRN 23070122192</a:t>
             </a:r>
             <a:endParaRPr lang="en-US" sz="1600" dirty="0"/>
           </a:p>
           <a:p>
-            <a:pPr algn="ctr" indent="0" marL="0">
+            <a:pPr marL="0" indent="0" algn="ctr">
               <a:lnSpc>
                 <a:spcPct val="115000"/>
               </a:lnSpc>
@@ -1672,19 +1433,10 @@
                 <a:ea typeface="Calibri" pitchFamily="34" charset="-122"/>
                 <a:cs typeface="Calibri" pitchFamily="34" charset="-120"/>
               </a:rPr>
-              <a:t>Sanidhya Awasthi – PRN 23070122192</a:t>
-            </a:r>
-            <a:endParaRPr lang="en-US" sz="1600" dirty="0"/>
-          </a:p>
-          <a:p>
-            <a:pPr algn="ctr" indent="0" marL="0">
-              <a:lnSpc>
-                <a:spcPct val="115000"/>
-              </a:lnSpc>
-              <a:buNone/>
-            </a:pPr>
-            <a:r>
-              <a:rPr lang="en-US" sz="1600" dirty="0">
+              <a:t>Faheemuddin Sayyed – </a:t>
+            </a:r>
+            <a:r>
+              <a:rPr lang="en-US" sz="1600">
                 <a:solidFill>
                   <a:srgbClr val="1A1A1A"/>
                 </a:solidFill>
@@ -1692,9 +1444,16 @@
                 <a:ea typeface="Calibri" pitchFamily="34" charset="-122"/>
                 <a:cs typeface="Calibri" pitchFamily="34" charset="-120"/>
               </a:rPr>
-              <a:t>Faheemuddin Sayyed – PRN 23070122196</a:t>
-            </a:r>
-            <a:endParaRPr lang="en-US" sz="1600" dirty="0"/>
+              <a:t>PRN 23070122196</a:t>
+            </a:r>
+            <a:endParaRPr lang="en-US" sz="1600" dirty="0">
+              <a:solidFill>
+                <a:srgbClr val="1A1A1A"/>
+              </a:solidFill>
+              <a:latin typeface="Calibri" pitchFamily="34" charset="0"/>
+              <a:ea typeface="Calibri" pitchFamily="34" charset="-122"/>
+              <a:cs typeface="Calibri" pitchFamily="34" charset="-120"/>
+            </a:endParaRPr>
           </a:p>
         </p:txBody>
       </p:sp>
@@ -1719,7 +1478,7 @@
           <a:bodyPr wrap="square" lIns="0" tIns="0" rIns="0" bIns="0" rtlCol="0" anchor="ctr"/>
           <a:lstStyle/>
           <a:p>
-            <a:pPr algn="ctr" indent="0" marL="0">
+            <a:pPr marL="0" indent="0" algn="ctr">
               <a:buNone/>
             </a:pPr>
             <a:r>
@@ -1731,7 +1490,18 @@
                 <a:ea typeface="Calibri" pitchFamily="34" charset="-122"/>
                 <a:cs typeface="Calibri" pitchFamily="34" charset="-120"/>
               </a:rPr>
-              <a:t>CA-2 DevOps  |  Department of Computer Engineering  |  Academic Year 2025–26</a:t>
+              <a:t>CA-2 DevOps  |  Department of Computer Engineering  |  Academic </a:t>
+            </a:r>
+            <a:r>
+              <a:rPr lang="en-US" sz="1200">
+                <a:solidFill>
+                  <a:srgbClr val="1A1A1A"/>
+                </a:solidFill>
+                <a:latin typeface="Calibri" pitchFamily="34" charset="0"/>
+                <a:ea typeface="Calibri" pitchFamily="34" charset="-122"/>
+                <a:cs typeface="Calibri" pitchFamily="34" charset="-120"/>
+              </a:rPr>
+              <a:t>Year 2026–27</a:t>
             </a:r>
             <a:endParaRPr lang="en-US" sz="1200" dirty="0"/>
           </a:p>
@@ -1753,6 +1523,7 @@
         <a:solidFill>
           <a:srgbClr val="FBFBFD"/>
         </a:solidFill>
+        <a:effectLst/>
       </p:bgPr>
     </p:bg>
     <p:spTree>
@@ -1771,14 +1542,14 @@
       </p:grpSpPr>
       <p:pic>
         <p:nvPicPr>
-          <p:cNvPr id="2" name="Image 0" descr="/tmp/claude-0/-home-user-ForgeFlow/c54c4f28-0214-5817-a71a-61a1132558a0/scratchpad/img/mark.png">    </p:cNvPr>
+          <p:cNvPr id="2" name="Image 0" descr="/tmp/claude-0/-home-user-ForgeFlow/c54c4f28-0214-5817-a71a-61a1132558a0/scratchpad/img/mark.png"/>
           <p:cNvPicPr>
             <a:picLocks noChangeAspect="1"/>
           </p:cNvPicPr>
           <p:nvPr/>
         </p:nvPicPr>
         <p:blipFill>
-          <a:blip r:embed="rId1"/>
+          <a:blip r:embed="rId3"/>
           <a:stretch>
             <a:fillRect/>
           </a:stretch>
@@ -1814,7 +1585,7 @@
           <a:bodyPr wrap="square" lIns="0" tIns="0" rIns="0" bIns="0" rtlCol="0" anchor="ctr"/>
           <a:lstStyle/>
           <a:p>
-            <a:pPr indent="0" marL="0">
+            <a:pPr marL="0" indent="0">
               <a:buNone/>
             </a:pPr>
             <a:r>
@@ -1828,9 +1599,6 @@
               </a:rPr>
               <a:t>ForgeFlow</a:t>
             </a:r>
-            <a:pPr indent="0" marL="0">
-              <a:buNone/>
-            </a:pPr>
             <a:r>
               <a:rPr lang="en-US" sz="1100" dirty="0">
                 <a:solidFill>
@@ -1867,7 +1635,7 @@
           <a:bodyPr wrap="square" lIns="0" tIns="0" rIns="0" bIns="0" rtlCol="0" anchor="ctr"/>
           <a:lstStyle/>
           <a:p>
-            <a:pPr algn="r" indent="0" marL="0">
+            <a:pPr marL="0" indent="0" algn="r">
               <a:buNone/>
             </a:pPr>
             <a:r>
@@ -1906,11 +1674,11 @@
           <a:bodyPr wrap="square" lIns="0" tIns="0" rIns="0" bIns="0" rtlCol="0" anchor="ctr"/>
           <a:lstStyle/>
           <a:p>
-            <a:pPr indent="0" marL="0">
-              <a:buNone/>
-            </a:pPr>
-            <a:r>
-              <a:rPr lang="en-US" sz="1050" b="1" spc="300" kern="0" dirty="0">
+            <a:pPr marL="0" indent="0">
+              <a:buNone/>
+            </a:pPr>
+            <a:r>
+              <a:rPr lang="en-US" sz="1050" b="1" kern="0" spc="300" dirty="0">
                 <a:solidFill>
                   <a:srgbClr val="5457E0"/>
                 </a:solidFill>
@@ -1945,7 +1713,7 @@
           <a:bodyPr wrap="square" lIns="0" tIns="0" rIns="0" bIns="0" rtlCol="0" anchor="ctr"/>
           <a:lstStyle/>
           <a:p>
-            <a:pPr indent="0" marL="0">
+            <a:pPr marL="0" indent="0">
               <a:buNone/>
             </a:pPr>
             <a:r>
@@ -1959,9 +1727,6 @@
               </a:rPr>
               <a:t>Two runtimes,</a:t>
             </a:r>
-            <a:pPr indent="0" marL="0">
-              <a:buNone/>
-            </a:pPr>
             <a:r>
               <a:rPr lang="en-US" sz="3000" b="1" dirty="0">
                 <a:solidFill>
@@ -1998,7 +1763,7 @@
           <a:bodyPr wrap="square" lIns="0" tIns="0" rIns="0" bIns="0" rtlCol="0" anchor="t"/>
           <a:lstStyle/>
           <a:p>
-            <a:pPr indent="0" marL="0">
+            <a:pPr marL="0" indent="0">
               <a:buNone/>
             </a:pPr>
             <a:r>
@@ -2012,9 +1777,6 @@
               </a:rPr>
               <a:t>ForgeFlow runs untrusted generated code in a Docker container per project and routes previews to those containers </a:t>
             </a:r>
-            <a:pPr indent="0" marL="0">
-              <a:buNone/>
-            </a:pPr>
             <a:r>
               <a:rPr lang="en-US" sz="1300" b="1" dirty="0">
                 <a:solidFill>
@@ -2026,9 +1788,6 @@
               </a:rPr>
               <a:t>by name</a:t>
             </a:r>
-            <a:pPr indent="0" marL="0">
-              <a:buNone/>
-            </a:pPr>
             <a:r>
               <a:rPr lang="en-US" sz="1300" dirty="0">
                 <a:solidFill>
@@ -2073,14 +1832,14 @@
       </p:sp>
       <p:pic>
         <p:nvPicPr>
-          <p:cNvPr id="9" name="Image 1" descr="/tmp/claude-0/-home-user-ForgeFlow/c54c4f28-0214-5817-a71a-61a1132558a0/scratchpad/img/arch.png">    </p:cNvPr>
+          <p:cNvPr id="9" name="Image 1" descr="/tmp/claude-0/-home-user-ForgeFlow/c54c4f28-0214-5817-a71a-61a1132558a0/scratchpad/img/arch.png"/>
           <p:cNvPicPr>
             <a:picLocks noChangeAspect="1"/>
           </p:cNvPicPr>
           <p:nvPr/>
         </p:nvPicPr>
         <p:blipFill>
-          <a:blip r:embed="rId2"/>
+          <a:blip r:embed="rId4"/>
           <a:stretch>
             <a:fillRect/>
           </a:stretch>
@@ -2121,7 +1880,7 @@
             <a:prstDash val="solid"/>
           </a:ln>
           <a:effectLst>
-            <a:outerShdw sx="100000" sy="100000" kx="0" ky="0" algn="bl" rotWithShape="0" blurRad="101600" dist="25400" dir="5400000">
+            <a:outerShdw blurRad="101600" dist="25400" dir="5400000" algn="bl" rotWithShape="0">
               <a:srgbClr val="14161C">
                 <a:alpha val="8000"/>
               </a:srgbClr>
@@ -2150,7 +1909,7 @@
           <a:bodyPr wrap="square" lIns="0" tIns="0" rIns="0" bIns="0" rtlCol="0" anchor="t"/>
           <a:lstStyle/>
           <a:p>
-            <a:pPr indent="0" marL="0">
+            <a:pPr marL="0" indent="0">
               <a:buNone/>
             </a:pPr>
             <a:r>
@@ -2189,7 +1948,7 @@
           <a:bodyPr wrap="square" lIns="0" tIns="0" rIns="0" bIns="0" rtlCol="0" anchor="t"/>
           <a:lstStyle/>
           <a:p>
-            <a:pPr indent="0" marL="0">
+            <a:pPr marL="0" indent="0">
               <a:spcAft>
                 <a:spcPts val="400"/>
               </a:spcAft>
@@ -2206,12 +1965,6 @@
               </a:rPr>
               <a:t>A Docker socket mounted into a pod solves sandbox </a:t>
             </a:r>
-            <a:pPr indent="0" marL="0">
-              <a:spcAft>
-                <a:spcPts val="400"/>
-              </a:spcAft>
-              <a:buNone/>
-            </a:pPr>
             <a:r>
               <a:rPr lang="en-US" sz="1100" b="1" dirty="0">
                 <a:solidFill>
@@ -2223,12 +1976,6 @@
               </a:rPr>
               <a:t>creation</a:t>
             </a:r>
-            <a:pPr indent="0" marL="0">
-              <a:spcAft>
-                <a:spcPts val="400"/>
-              </a:spcAft>
-              <a:buNone/>
-            </a:pPr>
             <a:r>
               <a:rPr lang="en-US" sz="1100" dirty="0">
                 <a:solidFill>
@@ -2240,12 +1987,6 @@
               </a:rPr>
               <a:t>, not </a:t>
             </a:r>
-            <a:pPr indent="0" marL="0">
-              <a:spcAft>
-                <a:spcPts val="400"/>
-              </a:spcAft>
-              <a:buNone/>
-            </a:pPr>
             <a:r>
               <a:rPr lang="en-US" sz="1100" b="1" dirty="0">
                 <a:solidFill>
@@ -2257,12 +1998,6 @@
               </a:rPr>
               <a:t>routing</a:t>
             </a:r>
-            <a:pPr indent="0" marL="0">
-              <a:spcAft>
-                <a:spcPts val="400"/>
-              </a:spcAft>
-              <a:buNone/>
-            </a:pPr>
             <a:r>
               <a:rPr lang="en-US" sz="1100" dirty="0">
                 <a:solidFill>
@@ -2274,12 +2009,6 @@
               </a:rPr>
               <a:t>: a pod cannot resolve </a:t>
             </a:r>
-            <a:pPr indent="0" marL="0">
-              <a:spcAft>
-                <a:spcPts val="400"/>
-              </a:spcAft>
-              <a:buNone/>
-            </a:pPr>
             <a:r>
               <a:rPr lang="en-US" sz="1100" dirty="0">
                 <a:solidFill>
@@ -2291,12 +2020,6 @@
               </a:rPr>
               <a:t>forgeflow-sb-&lt;id&gt;</a:t>
             </a:r>
-            <a:pPr indent="0" marL="0">
-              <a:spcAft>
-                <a:spcPts val="400"/>
-              </a:spcAft>
-              <a:buNone/>
-            </a:pPr>
             <a:r>
               <a:rPr lang="en-US" sz="1100" dirty="0">
                 <a:solidFill>
@@ -2338,7 +2061,7 @@
             <a:prstDash val="solid"/>
           </a:ln>
           <a:effectLst>
-            <a:outerShdw sx="100000" sy="100000" kx="0" ky="0" algn="bl" rotWithShape="0" blurRad="101600" dist="25400" dir="5400000">
+            <a:outerShdw blurRad="101600" dist="25400" dir="5400000" algn="bl" rotWithShape="0">
               <a:srgbClr val="14161C">
                 <a:alpha val="8000"/>
               </a:srgbClr>
@@ -2367,7 +2090,7 @@
           <a:bodyPr wrap="square" lIns="0" tIns="0" rIns="0" bIns="0" rtlCol="0" anchor="t"/>
           <a:lstStyle/>
           <a:p>
-            <a:pPr indent="0" marL="0">
+            <a:pPr marL="0" indent="0">
               <a:buNone/>
             </a:pPr>
             <a:r>
@@ -2406,7 +2129,7 @@
           <a:bodyPr wrap="square" lIns="0" tIns="0" rIns="0" bIns="0" rtlCol="0" anchor="t"/>
           <a:lstStyle/>
           <a:p>
-            <a:pPr indent="0" marL="0">
+            <a:pPr marL="0" indent="0">
               <a:spcAft>
                 <a:spcPts val="400"/>
               </a:spcAft>
@@ -2453,7 +2176,7 @@
             <a:prstDash val="solid"/>
           </a:ln>
           <a:effectLst>
-            <a:outerShdw sx="100000" sy="100000" kx="0" ky="0" algn="bl" rotWithShape="0" blurRad="101600" dist="25400" dir="5400000">
+            <a:outerShdw blurRad="101600" dist="25400" dir="5400000" algn="bl" rotWithShape="0">
               <a:srgbClr val="14161C">
                 <a:alpha val="8000"/>
               </a:srgbClr>
@@ -2482,7 +2205,7 @@
           <a:bodyPr wrap="square" lIns="0" tIns="0" rIns="0" bIns="0" rtlCol="0" anchor="t"/>
           <a:lstStyle/>
           <a:p>
-            <a:pPr indent="0" marL="0">
+            <a:pPr marL="0" indent="0">
               <a:buNone/>
             </a:pPr>
             <a:r>
@@ -2521,7 +2244,7 @@
           <a:bodyPr wrap="square" lIns="0" tIns="0" rIns="0" bIns="0" rtlCol="0" anchor="t"/>
           <a:lstStyle/>
           <a:p>
-            <a:pPr indent="0" marL="0">
+            <a:pPr marL="0" indent="0">
               <a:spcAft>
                 <a:spcPts val="400"/>
               </a:spcAft>
@@ -2538,12 +2261,6 @@
               </a:rPr>
               <a:t>WebSocket subscribers, the replay ring and rate limiters live in process memory. </a:t>
             </a:r>
-            <a:pPr indent="0" marL="0">
-              <a:spcAft>
-                <a:spcPts val="400"/>
-              </a:spcAft>
-              <a:buNone/>
-            </a:pPr>
             <a:r>
               <a:rPr lang="en-US" sz="1100" dirty="0">
                 <a:solidFill>
@@ -2555,12 +2272,6 @@
               </a:rPr>
               <a:t>--workers 2</a:t>
             </a:r>
-            <a:pPr indent="0" marL="0">
-              <a:spcAft>
-                <a:spcPts val="400"/>
-              </a:spcAft>
-              <a:buNone/>
-            </a:pPr>
             <a:r>
               <a:rPr lang="en-US" sz="1100" dirty="0">
                 <a:solidFill>
@@ -2624,11 +2335,11 @@
           <a:bodyPr wrap="square" lIns="0" tIns="0" rIns="0" bIns="0" rtlCol="0" anchor="ctr"/>
           <a:lstStyle/>
           <a:p>
-            <a:pPr indent="0" marL="0">
-              <a:buNone/>
-            </a:pPr>
-            <a:r>
-              <a:rPr lang="en-US" sz="900" b="1" spc="200" kern="0" dirty="0">
+            <a:pPr marL="0" indent="0">
+              <a:buNone/>
+            </a:pPr>
+            <a:r>
+              <a:rPr lang="en-US" sz="900" b="1" kern="0" spc="200" dirty="0">
                 <a:solidFill>
                   <a:srgbClr val="878D9C"/>
                 </a:solidFill>
@@ -2663,7 +2374,7 @@
           <a:bodyPr wrap="square" lIns="0" tIns="0" rIns="0" bIns="0" rtlCol="0" anchor="ctr"/>
           <a:lstStyle/>
           <a:p>
-            <a:pPr indent="0" marL="0">
+            <a:pPr marL="0" indent="0">
               <a:buNone/>
             </a:pPr>
             <a:r>
@@ -2729,11 +2440,11 @@
           <a:bodyPr wrap="square" lIns="0" tIns="0" rIns="0" bIns="0" rtlCol="0" anchor="ctr"/>
           <a:lstStyle/>
           <a:p>
-            <a:pPr indent="0" marL="0">
-              <a:buNone/>
-            </a:pPr>
-            <a:r>
-              <a:rPr lang="en-US" sz="900" b="1" spc="200" kern="0" dirty="0">
+            <a:pPr marL="0" indent="0">
+              <a:buNone/>
+            </a:pPr>
+            <a:r>
+              <a:rPr lang="en-US" sz="900" b="1" kern="0" spc="200" dirty="0">
                 <a:solidFill>
                   <a:srgbClr val="878D9C"/>
                 </a:solidFill>
@@ -2768,7 +2479,7 @@
           <a:bodyPr wrap="square" lIns="0" tIns="0" rIns="0" bIns="0" rtlCol="0" anchor="ctr"/>
           <a:lstStyle/>
           <a:p>
-            <a:pPr indent="0" marL="0">
+            <a:pPr marL="0" indent="0">
               <a:buNone/>
             </a:pPr>
             <a:r>
@@ -2834,11 +2545,11 @@
           <a:bodyPr wrap="square" lIns="0" tIns="0" rIns="0" bIns="0" rtlCol="0" anchor="ctr"/>
           <a:lstStyle/>
           <a:p>
-            <a:pPr indent="0" marL="0">
-              <a:buNone/>
-            </a:pPr>
-            <a:r>
-              <a:rPr lang="en-US" sz="900" b="1" spc="200" kern="0" dirty="0">
+            <a:pPr marL="0" indent="0">
+              <a:buNone/>
+            </a:pPr>
+            <a:r>
+              <a:rPr lang="en-US" sz="900" b="1" kern="0" spc="200" dirty="0">
                 <a:solidFill>
                   <a:srgbClr val="878D9C"/>
                 </a:solidFill>
@@ -2873,7 +2584,7 @@
           <a:bodyPr wrap="square" lIns="0" tIns="0" rIns="0" bIns="0" rtlCol="0" anchor="ctr"/>
           <a:lstStyle/>
           <a:p>
-            <a:pPr indent="0" marL="0">
+            <a:pPr marL="0" indent="0">
               <a:buNone/>
             </a:pPr>
             <a:r>
@@ -2939,11 +2650,11 @@
           <a:bodyPr wrap="square" lIns="0" tIns="0" rIns="0" bIns="0" rtlCol="0" anchor="ctr"/>
           <a:lstStyle/>
           <a:p>
-            <a:pPr indent="0" marL="0">
-              <a:buNone/>
-            </a:pPr>
-            <a:r>
-              <a:rPr lang="en-US" sz="900" b="1" spc="200" kern="0" dirty="0">
+            <a:pPr marL="0" indent="0">
+              <a:buNone/>
+            </a:pPr>
+            <a:r>
+              <a:rPr lang="en-US" sz="900" b="1" kern="0" spc="200" dirty="0">
                 <a:solidFill>
                   <a:srgbClr val="878D9C"/>
                 </a:solidFill>
@@ -2978,7 +2689,7 @@
           <a:bodyPr wrap="square" lIns="0" tIns="0" rIns="0" bIns="0" rtlCol="0" anchor="ctr"/>
           <a:lstStyle/>
           <a:p>
-            <a:pPr indent="0" marL="0">
+            <a:pPr marL="0" indent="0">
               <a:buNone/>
             </a:pPr>
             <a:r>
@@ -3044,11 +2755,11 @@
           <a:bodyPr wrap="square" lIns="0" tIns="0" rIns="0" bIns="0" rtlCol="0" anchor="ctr"/>
           <a:lstStyle/>
           <a:p>
-            <a:pPr indent="0" marL="0">
-              <a:buNone/>
-            </a:pPr>
-            <a:r>
-              <a:rPr lang="en-US" sz="900" b="1" spc="200" kern="0" dirty="0">
+            <a:pPr marL="0" indent="0">
+              <a:buNone/>
+            </a:pPr>
+            <a:r>
+              <a:rPr lang="en-US" sz="900" b="1" kern="0" spc="200" dirty="0">
                 <a:solidFill>
                   <a:srgbClr val="878D9C"/>
                 </a:solidFill>
@@ -3083,7 +2794,7 @@
           <a:bodyPr wrap="square" lIns="0" tIns="0" rIns="0" bIns="0" rtlCol="0" anchor="ctr"/>
           <a:lstStyle/>
           <a:p>
-            <a:pPr indent="0" marL="0">
+            <a:pPr marL="0" indent="0">
               <a:buNone/>
             </a:pPr>
             <a:r>
@@ -3117,6 +2828,7 @@
         <a:solidFill>
           <a:srgbClr val="FBFBFD"/>
         </a:solidFill>
+        <a:effectLst/>
       </p:bgPr>
     </p:bg>
     <p:spTree>
@@ -3135,14 +2847,14 @@
       </p:grpSpPr>
       <p:pic>
         <p:nvPicPr>
-          <p:cNvPr id="2" name="Image 0" descr="/tmp/claude-0/-home-user-ForgeFlow/c54c4f28-0214-5817-a71a-61a1132558a0/scratchpad/img/mark.png">    </p:cNvPr>
+          <p:cNvPr id="2" name="Image 0" descr="/tmp/claude-0/-home-user-ForgeFlow/c54c4f28-0214-5817-a71a-61a1132558a0/scratchpad/img/mark.png"/>
           <p:cNvPicPr>
             <a:picLocks noChangeAspect="1"/>
           </p:cNvPicPr>
           <p:nvPr/>
         </p:nvPicPr>
         <p:blipFill>
-          <a:blip r:embed="rId1"/>
+          <a:blip r:embed="rId3"/>
           <a:stretch>
             <a:fillRect/>
           </a:stretch>
@@ -3178,7 +2890,7 @@
           <a:bodyPr wrap="square" lIns="0" tIns="0" rIns="0" bIns="0" rtlCol="0" anchor="ctr"/>
           <a:lstStyle/>
           <a:p>
-            <a:pPr indent="0" marL="0">
+            <a:pPr marL="0" indent="0">
               <a:buNone/>
             </a:pPr>
             <a:r>
@@ -3192,9 +2904,6 @@
               </a:rPr>
               <a:t>ForgeFlow</a:t>
             </a:r>
-            <a:pPr indent="0" marL="0">
-              <a:buNone/>
-            </a:pPr>
             <a:r>
               <a:rPr lang="en-US" sz="1100" dirty="0">
                 <a:solidFill>
@@ -3231,7 +2940,7 @@
           <a:bodyPr wrap="square" lIns="0" tIns="0" rIns="0" bIns="0" rtlCol="0" anchor="ctr"/>
           <a:lstStyle/>
           <a:p>
-            <a:pPr algn="r" indent="0" marL="0">
+            <a:pPr marL="0" indent="0" algn="r">
               <a:buNone/>
             </a:pPr>
             <a:r>
@@ -3270,11 +2979,11 @@
           <a:bodyPr wrap="square" lIns="0" tIns="0" rIns="0" bIns="0" rtlCol="0" anchor="ctr"/>
           <a:lstStyle/>
           <a:p>
-            <a:pPr indent="0" marL="0">
-              <a:buNone/>
-            </a:pPr>
-            <a:r>
-              <a:rPr lang="en-US" sz="1050" b="1" spc="300" kern="0" dirty="0">
+            <a:pPr marL="0" indent="0">
+              <a:buNone/>
+            </a:pPr>
+            <a:r>
+              <a:rPr lang="en-US" sz="1050" b="1" kern="0" spc="300" dirty="0">
                 <a:solidFill>
                   <a:srgbClr val="5457E0"/>
                 </a:solidFill>
@@ -3309,7 +3018,7 @@
           <a:bodyPr wrap="square" lIns="0" tIns="0" rIns="0" bIns="0" rtlCol="0" anchor="ctr"/>
           <a:lstStyle/>
           <a:p>
-            <a:pPr indent="0" marL="0">
+            <a:pPr marL="0" indent="0">
               <a:buNone/>
             </a:pPr>
             <a:r>
@@ -3323,9 +3032,6 @@
               </a:rPr>
               <a:t>CI proves it.</a:t>
             </a:r>
-            <a:pPr indent="0" marL="0">
-              <a:buNone/>
-            </a:pPr>
             <a:r>
               <a:rPr lang="en-US" sz="3000" b="1" dirty="0">
                 <a:solidFill>
@@ -3370,14 +3076,14 @@
       </p:sp>
       <p:pic>
         <p:nvPicPr>
-          <p:cNvPr id="8" name="Image 1" descr="/tmp/claude-0/-home-user-ForgeFlow/c54c4f28-0214-5817-a71a-61a1132558a0/scratchpad/img/pipeline.png">    </p:cNvPr>
+          <p:cNvPr id="8" name="Image 1" descr="/tmp/claude-0/-home-user-ForgeFlow/c54c4f28-0214-5817-a71a-61a1132558a0/scratchpad/img/pipeline.png"/>
           <p:cNvPicPr>
             <a:picLocks noChangeAspect="1"/>
           </p:cNvPicPr>
           <p:nvPr/>
         </p:nvPicPr>
         <p:blipFill>
-          <a:blip r:embed="rId2"/>
+          <a:blip r:embed="rId4"/>
           <a:stretch>
             <a:fillRect/>
           </a:stretch>
@@ -3413,7 +3119,7 @@
           <a:bodyPr wrap="square" lIns="0" tIns="0" rIns="0" bIns="0" rtlCol="0" anchor="ctr"/>
           <a:lstStyle/>
           <a:p>
-            <a:pPr algn="ctr" indent="0" marL="0">
+            <a:pPr marL="0" indent="0" algn="ctr">
               <a:buNone/>
             </a:pPr>
             <a:r>
@@ -3457,7 +3163,7 @@
             <a:prstDash val="solid"/>
           </a:ln>
           <a:effectLst>
-            <a:outerShdw sx="100000" sy="100000" kx="0" ky="0" algn="bl" rotWithShape="0" blurRad="101600" dist="25400" dir="5400000">
+            <a:outerShdw blurRad="101600" dist="25400" dir="5400000" algn="bl" rotWithShape="0">
               <a:srgbClr val="14161C">
                 <a:alpha val="8000"/>
               </a:srgbClr>
@@ -3486,7 +3192,7 @@
           <a:bodyPr wrap="square" lIns="0" tIns="0" rIns="0" bIns="0" rtlCol="0" anchor="t"/>
           <a:lstStyle/>
           <a:p>
-            <a:pPr indent="0" marL="0">
+            <a:pPr marL="0" indent="0">
               <a:buNone/>
             </a:pPr>
             <a:r>
@@ -3500,9 +3206,6 @@
               </a:rPr>
               <a:t>workflow_run</a:t>
             </a:r>
-            <a:pPr indent="0" marL="0">
-              <a:buNone/>
-            </a:pPr>
             <a:r>
               <a:rPr lang="en-US" sz="1200" b="1" dirty="0">
                 <a:solidFill>
@@ -3514,9 +3217,6 @@
               </a:rPr>
               <a:t>, not </a:t>
             </a:r>
-            <a:pPr indent="0" marL="0">
-              <a:buNone/>
-            </a:pPr>
             <a:r>
               <a:rPr lang="en-US" sz="1200" b="1" dirty="0">
                 <a:solidFill>
@@ -3553,7 +3253,7 @@
           <a:bodyPr wrap="square" lIns="0" tIns="0" rIns="0" bIns="0" rtlCol="0" anchor="t"/>
           <a:lstStyle/>
           <a:p>
-            <a:pPr indent="0" marL="0">
+            <a:pPr marL="0" indent="0">
               <a:spcAft>
                 <a:spcPts val="400"/>
               </a:spcAft>
@@ -3600,7 +3300,7 @@
             <a:prstDash val="solid"/>
           </a:ln>
           <a:effectLst>
-            <a:outerShdw sx="100000" sy="100000" kx="0" ky="0" algn="bl" rotWithShape="0" blurRad="101600" dist="25400" dir="5400000">
+            <a:outerShdw blurRad="101600" dist="25400" dir="5400000" algn="bl" rotWithShape="0">
               <a:srgbClr val="14161C">
                 <a:alpha val="8000"/>
               </a:srgbClr>
@@ -3629,7 +3329,7 @@
           <a:bodyPr wrap="square" lIns="0" tIns="0" rIns="0" bIns="0" rtlCol="0" anchor="t"/>
           <a:lstStyle/>
           <a:p>
-            <a:pPr indent="0" marL="0">
+            <a:pPr marL="0" indent="0">
               <a:buNone/>
             </a:pPr>
             <a:r>
@@ -3668,7 +3368,7 @@
           <a:bodyPr wrap="square" lIns="0" tIns="0" rIns="0" bIns="0" rtlCol="0" anchor="t"/>
           <a:lstStyle/>
           <a:p>
-            <a:pPr indent="0" marL="0">
+            <a:pPr marL="0" indent="0">
               <a:spcAft>
                 <a:spcPts val="400"/>
               </a:spcAft>
@@ -3685,12 +3385,6 @@
               </a:rPr>
               <a:t>If the VM tracked </a:t>
             </a:r>
-            <a:pPr indent="0" marL="0">
-              <a:spcAft>
-                <a:spcPts val="400"/>
-              </a:spcAft>
-              <a:buNone/>
-            </a:pPr>
             <a:r>
               <a:rPr lang="en-US" sz="1050" dirty="0">
                 <a:solidFill>
@@ -3702,12 +3396,6 @@
               </a:rPr>
               <a:t>latest</a:t>
             </a:r>
-            <a:pPr indent="0" marL="0">
-              <a:spcAft>
-                <a:spcPts val="400"/>
-              </a:spcAft>
-              <a:buNone/>
-            </a:pPr>
             <a:r>
               <a:rPr lang="en-US" sz="1050" dirty="0">
                 <a:solidFill>
@@ -3749,7 +3437,7 @@
             <a:prstDash val="solid"/>
           </a:ln>
           <a:effectLst>
-            <a:outerShdw sx="100000" sy="100000" kx="0" ky="0" algn="bl" rotWithShape="0" blurRad="101600" dist="25400" dir="5400000">
+            <a:outerShdw blurRad="101600" dist="25400" dir="5400000" algn="bl" rotWithShape="0">
               <a:srgbClr val="14161C">
                 <a:alpha val="8000"/>
               </a:srgbClr>
@@ -3778,7 +3466,7 @@
           <a:bodyPr wrap="square" lIns="0" tIns="0" rIns="0" bIns="0" rtlCol="0" anchor="t"/>
           <a:lstStyle/>
           <a:p>
-            <a:pPr indent="0" marL="0">
+            <a:pPr marL="0" indent="0">
               <a:buNone/>
             </a:pPr>
             <a:r>
@@ -3817,7 +3505,7 @@
           <a:bodyPr wrap="square" lIns="0" tIns="0" rIns="0" bIns="0" rtlCol="0" anchor="t"/>
           <a:lstStyle/>
           <a:p>
-            <a:pPr indent="0" marL="0">
+            <a:pPr marL="0" indent="0">
               <a:spcAft>
                 <a:spcPts val="400"/>
               </a:spcAft>
@@ -3864,7 +3552,7 @@
             <a:prstDash val="solid"/>
           </a:ln>
           <a:effectLst>
-            <a:outerShdw sx="100000" sy="100000" kx="0" ky="0" algn="bl" rotWithShape="0" blurRad="101600" dist="25400" dir="5400000">
+            <a:outerShdw blurRad="101600" dist="25400" dir="5400000" algn="bl" rotWithShape="0">
               <a:srgbClr val="14161C">
                 <a:alpha val="8000"/>
               </a:srgbClr>
@@ -3893,7 +3581,7 @@
           <a:bodyPr wrap="square" lIns="0" tIns="0" rIns="0" bIns="0" rtlCol="0" anchor="t"/>
           <a:lstStyle/>
           <a:p>
-            <a:pPr indent="0" marL="0">
+            <a:pPr marL="0" indent="0">
               <a:buNone/>
             </a:pPr>
             <a:r>
@@ -3932,7 +3620,7 @@
           <a:bodyPr wrap="square" lIns="0" tIns="0" rIns="0" bIns="0" rtlCol="0" anchor="t"/>
           <a:lstStyle/>
           <a:p>
-            <a:pPr indent="0" marL="0">
+            <a:pPr marL="0" indent="0">
               <a:spcAft>
                 <a:spcPts val="400"/>
               </a:spcAft>
@@ -3969,6 +3657,7 @@
         <a:solidFill>
           <a:srgbClr val="FBFBFD"/>
         </a:solidFill>
+        <a:effectLst/>
       </p:bgPr>
     </p:bg>
     <p:spTree>
@@ -3987,14 +3676,14 @@
       </p:grpSpPr>
       <p:pic>
         <p:nvPicPr>
-          <p:cNvPr id="2" name="Image 0" descr="/tmp/claude-0/-home-user-ForgeFlow/c54c4f28-0214-5817-a71a-61a1132558a0/scratchpad/img/mark.png">    </p:cNvPr>
+          <p:cNvPr id="2" name="Image 0" descr="/tmp/claude-0/-home-user-ForgeFlow/c54c4f28-0214-5817-a71a-61a1132558a0/scratchpad/img/mark.png"/>
           <p:cNvPicPr>
             <a:picLocks noChangeAspect="1"/>
           </p:cNvPicPr>
           <p:nvPr/>
         </p:nvPicPr>
         <p:blipFill>
-          <a:blip r:embed="rId1"/>
+          <a:blip r:embed="rId3"/>
           <a:stretch>
             <a:fillRect/>
           </a:stretch>
@@ -4030,7 +3719,7 @@
           <a:bodyPr wrap="square" lIns="0" tIns="0" rIns="0" bIns="0" rtlCol="0" anchor="ctr"/>
           <a:lstStyle/>
           <a:p>
-            <a:pPr indent="0" marL="0">
+            <a:pPr marL="0" indent="0">
               <a:buNone/>
             </a:pPr>
             <a:r>
@@ -4044,9 +3733,6 @@
               </a:rPr>
               <a:t>ForgeFlow</a:t>
             </a:r>
-            <a:pPr indent="0" marL="0">
-              <a:buNone/>
-            </a:pPr>
             <a:r>
               <a:rPr lang="en-US" sz="1100" dirty="0">
                 <a:solidFill>
@@ -4083,7 +3769,7 @@
           <a:bodyPr wrap="square" lIns="0" tIns="0" rIns="0" bIns="0" rtlCol="0" anchor="ctr"/>
           <a:lstStyle/>
           <a:p>
-            <a:pPr algn="r" indent="0" marL="0">
+            <a:pPr marL="0" indent="0" algn="r">
               <a:buNone/>
             </a:pPr>
             <a:r>
@@ -4122,11 +3808,11 @@
           <a:bodyPr wrap="square" lIns="0" tIns="0" rIns="0" bIns="0" rtlCol="0" anchor="ctr"/>
           <a:lstStyle/>
           <a:p>
-            <a:pPr indent="0" marL="0">
-              <a:buNone/>
-            </a:pPr>
-            <a:r>
-              <a:rPr lang="en-US" sz="1050" b="1" spc="300" kern="0" dirty="0">
+            <a:pPr marL="0" indent="0">
+              <a:buNone/>
+            </a:pPr>
+            <a:r>
+              <a:rPr lang="en-US" sz="1050" b="1" kern="0" spc="300" dirty="0">
                 <a:solidFill>
                   <a:srgbClr val="5457E0"/>
                 </a:solidFill>
@@ -4161,7 +3847,7 @@
           <a:bodyPr wrap="square" lIns="0" tIns="0" rIns="0" bIns="0" rtlCol="0" anchor="ctr"/>
           <a:lstStyle/>
           <a:p>
-            <a:pPr indent="0" marL="0">
+            <a:pPr marL="0" indent="0">
               <a:buNone/>
             </a:pPr>
             <a:r>
@@ -4175,9 +3861,6 @@
               </a:rPr>
               <a:t>Every config parsed correctly</a:t>
             </a:r>
-            <a:pPr indent="0" marL="0">
-              <a:buNone/>
-            </a:pPr>
             <a:r>
               <a:rPr lang="en-US" sz="3000" b="1" dirty="0">
                 <a:solidFill>
@@ -4219,7 +3902,7 @@
             <a:prstDash val="solid"/>
           </a:ln>
           <a:effectLst>
-            <a:outerShdw sx="100000" sy="100000" kx="0" ky="0" algn="bl" rotWithShape="0" blurRad="101600" dist="25400" dir="5400000">
+            <a:outerShdw blurRad="101600" dist="25400" dir="5400000" algn="bl" rotWithShape="0">
               <a:srgbClr val="14161C">
                 <a:alpha val="8000"/>
               </a:srgbClr>
@@ -4248,7 +3931,7 @@
           <a:bodyPr wrap="square" lIns="0" tIns="0" rIns="0" bIns="0" rtlCol="0" anchor="ctr"/>
           <a:lstStyle/>
           <a:p>
-            <a:pPr indent="0" marL="0">
+            <a:pPr marL="0" indent="0">
               <a:buNone/>
             </a:pPr>
             <a:r>
@@ -4287,7 +3970,7 @@
           <a:bodyPr wrap="square" lIns="0" tIns="0" rIns="0" bIns="0" rtlCol="0" anchor="t"/>
           <a:lstStyle/>
           <a:p>
-            <a:pPr indent="0" marL="0">
+            <a:pPr marL="0" indent="0">
               <a:buNone/>
             </a:pPr>
             <a:r>
@@ -4301,9 +3984,6 @@
               </a:rPr>
               <a:t>A standard nginx </a:t>
             </a:r>
-            <a:pPr indent="0" marL="0">
-              <a:buNone/>
-            </a:pPr>
             <a:r>
               <a:rPr lang="en-US" sz="1100" dirty="0">
                 <a:solidFill>
@@ -4315,9 +3995,6 @@
               </a:rPr>
               <a:t>proxy_pass</a:t>
             </a:r>
-            <a:pPr indent="0" marL="0">
-              <a:buNone/>
-            </a:pPr>
             <a:r>
               <a:rPr lang="en-US" sz="1100" dirty="0">
                 <a:solidFill>
@@ -4354,7 +4031,7 @@
           <a:bodyPr wrap="square" lIns="0" tIns="0" rIns="0" bIns="0" rtlCol="0" anchor="ctr"/>
           <a:lstStyle/>
           <a:p>
-            <a:pPr indent="0" marL="0">
+            <a:pPr marL="0" indent="0">
               <a:buNone/>
             </a:pPr>
             <a:r>
@@ -4420,7 +4097,7 @@
           <a:bodyPr wrap="square" lIns="0" tIns="0" rIns="0" bIns="0" rtlCol="0" anchor="ctr"/>
           <a:lstStyle/>
           <a:p>
-            <a:pPr indent="0" marL="0">
+            <a:pPr marL="0" indent="0">
               <a:buNone/>
             </a:pPr>
             <a:r>
@@ -4434,9 +4111,6 @@
               </a:rPr>
               <a:t>With </a:t>
             </a:r>
-            <a:pPr indent="0" marL="0">
-              <a:buNone/>
-            </a:pPr>
             <a:r>
               <a:rPr lang="en-US" sz="1000" dirty="0">
                 <a:solidFill>
@@ -4448,9 +4122,6 @@
               </a:rPr>
               <a:t>proxy_http_version 1.1</a:t>
             </a:r>
-            <a:pPr indent="0" marL="0">
-              <a:buNone/>
-            </a:pPr>
             <a:r>
               <a:rPr lang="en-US" sz="1000" dirty="0">
                 <a:solidFill>
@@ -4462,9 +4133,6 @@
               </a:rPr>
               <a:t> + </a:t>
             </a:r>
-            <a:pPr indent="0" marL="0">
-              <a:buNone/>
-            </a:pPr>
             <a:r>
               <a:rPr lang="en-US" sz="1000" dirty="0">
                 <a:solidFill>
@@ -4476,9 +4144,6 @@
               </a:rPr>
               <a:t>Upgrade</a:t>
             </a:r>
-            <a:pPr indent="0" marL="0">
-              <a:buNone/>
-            </a:pPr>
             <a:r>
               <a:rPr lang="en-US" sz="1000" dirty="0">
                 <a:solidFill>
@@ -4490,9 +4155,6 @@
               </a:rPr>
               <a:t> + </a:t>
             </a:r>
-            <a:pPr indent="0" marL="0">
-              <a:buNone/>
-            </a:pPr>
             <a:r>
               <a:rPr lang="en-US" sz="1000" dirty="0">
                 <a:solidFill>
@@ -4529,7 +4191,7 @@
           <a:bodyPr wrap="square" lIns="0" tIns="0" rIns="0" bIns="0" rtlCol="0" anchor="ctr"/>
           <a:lstStyle/>
           <a:p>
-            <a:pPr algn="r" indent="0" marL="0">
+            <a:pPr marL="0" indent="0" algn="r">
               <a:buNone/>
             </a:pPr>
             <a:r>
@@ -4595,7 +4257,7 @@
           <a:bodyPr wrap="square" lIns="0" tIns="0" rIns="0" bIns="0" rtlCol="0" anchor="ctr"/>
           <a:lstStyle/>
           <a:p>
-            <a:pPr indent="0" marL="0">
+            <a:pPr marL="0" indent="0">
               <a:buNone/>
             </a:pPr>
             <a:r>
@@ -4634,7 +4296,7 @@
           <a:bodyPr wrap="square" lIns="0" tIns="0" rIns="0" bIns="0" rtlCol="0" anchor="ctr"/>
           <a:lstStyle/>
           <a:p>
-            <a:pPr algn="r" indent="0" marL="0">
+            <a:pPr marL="0" indent="0" algn="r">
               <a:buNone/>
             </a:pPr>
             <a:r>
@@ -4678,7 +4340,7 @@
             <a:prstDash val="solid"/>
           </a:ln>
           <a:effectLst>
-            <a:outerShdw sx="100000" sy="100000" kx="0" ky="0" algn="bl" rotWithShape="0" blurRad="101600" dist="25400" dir="5400000">
+            <a:outerShdw blurRad="101600" dist="25400" dir="5400000" algn="bl" rotWithShape="0">
               <a:srgbClr val="14161C">
                 <a:alpha val="8000"/>
               </a:srgbClr>
@@ -4707,7 +4369,7 @@
           <a:bodyPr wrap="square" lIns="0" tIns="0" rIns="0" bIns="0" rtlCol="0" anchor="t"/>
           <a:lstStyle/>
           <a:p>
-            <a:pPr indent="0" marL="0">
+            <a:pPr marL="0" indent="0">
               <a:buNone/>
             </a:pPr>
             <a:r>
@@ -4746,7 +4408,7 @@
           <a:bodyPr wrap="square" lIns="0" tIns="0" rIns="0" bIns="0" rtlCol="0" anchor="t"/>
           <a:lstStyle/>
           <a:p>
-            <a:pPr indent="0" marL="0">
+            <a:pPr marL="0" indent="0">
               <a:spcAft>
                 <a:spcPts val="400"/>
               </a:spcAft>
@@ -4763,7 +4425,98 @@
               </a:rPr>
               <a:t>Oracle’s Ubuntu image ends its </a:t>
             </a:r>
-            <a:pPr indent="0" marL="0">
+            <a:r>
+              <a:rPr lang="en-US" sz="1150" dirty="0">
+                <a:solidFill>
+                  <a:srgbClr val="14161C"/>
+                </a:solidFill>
+                <a:latin typeface="Courier New" pitchFamily="34" charset="0"/>
+                <a:ea typeface="Courier New" pitchFamily="34" charset="-122"/>
+                <a:cs typeface="Courier New" pitchFamily="34" charset="-120"/>
+              </a:rPr>
+              <a:t>INPUT</a:t>
+            </a:r>
+            <a:r>
+              <a:rPr lang="en-US" sz="1150" dirty="0">
+                <a:solidFill>
+                  <a:srgbClr val="565C6B"/>
+                </a:solidFill>
+                <a:latin typeface="Arial" pitchFamily="34" charset="0"/>
+                <a:ea typeface="Arial" pitchFamily="34" charset="-122"/>
+                <a:cs typeface="Arial" pitchFamily="34" charset="-120"/>
+              </a:rPr>
+              <a:t> chain in a blanket </a:t>
+            </a:r>
+            <a:r>
+              <a:rPr lang="en-US" sz="1150" dirty="0">
+                <a:solidFill>
+                  <a:srgbClr val="14161C"/>
+                </a:solidFill>
+                <a:latin typeface="Courier New" pitchFamily="34" charset="0"/>
+                <a:ea typeface="Courier New" pitchFamily="34" charset="-122"/>
+                <a:cs typeface="Courier New" pitchFamily="34" charset="-120"/>
+              </a:rPr>
+              <a:t>REJECT</a:t>
+            </a:r>
+            <a:r>
+              <a:rPr lang="en-US" sz="1150" dirty="0">
+                <a:solidFill>
+                  <a:srgbClr val="565C6B"/>
+                </a:solidFill>
+                <a:latin typeface="Arial" pitchFamily="34" charset="0"/>
+                <a:ea typeface="Arial" pitchFamily="34" charset="-122"/>
+                <a:cs typeface="Arial" pitchFamily="34" charset="-120"/>
+              </a:rPr>
+              <a:t>. ufw writes to a different chain, so </a:t>
+            </a:r>
+            <a:r>
+              <a:rPr lang="en-US" sz="1150" dirty="0">
+                <a:solidFill>
+                  <a:srgbClr val="14161C"/>
+                </a:solidFill>
+                <a:latin typeface="Courier New" pitchFamily="34" charset="0"/>
+                <a:ea typeface="Courier New" pitchFamily="34" charset="-122"/>
+                <a:cs typeface="Courier New" pitchFamily="34" charset="-120"/>
+              </a:rPr>
+              <a:t>ufw allow 443</a:t>
+            </a:r>
+            <a:r>
+              <a:rPr lang="en-US" sz="1150" dirty="0">
+                <a:solidFill>
+                  <a:srgbClr val="565C6B"/>
+                </a:solidFill>
+                <a:latin typeface="Arial" pitchFamily="34" charset="0"/>
+                <a:ea typeface="Arial" pitchFamily="34" charset="-122"/>
+                <a:cs typeface="Arial" pitchFamily="34" charset="-120"/>
+              </a:rPr>
+              <a:t> succeeds, </a:t>
+            </a:r>
+            <a:r>
+              <a:rPr lang="en-US" sz="1150" dirty="0">
+                <a:solidFill>
+                  <a:srgbClr val="14161C"/>
+                </a:solidFill>
+                <a:latin typeface="Courier New" pitchFamily="34" charset="0"/>
+                <a:ea typeface="Courier New" pitchFamily="34" charset="-122"/>
+                <a:cs typeface="Courier New" pitchFamily="34" charset="-120"/>
+              </a:rPr>
+              <a:t>ufw status</a:t>
+            </a:r>
+            <a:r>
+              <a:rPr lang="en-US" sz="1150" dirty="0">
+                <a:solidFill>
+                  <a:srgbClr val="565C6B"/>
+                </a:solidFill>
+                <a:latin typeface="Arial" pitchFamily="34" charset="0"/>
+                <a:ea typeface="Arial" pitchFamily="34" charset="-122"/>
+                <a:cs typeface="Arial" pitchFamily="34" charset="-120"/>
+              </a:rPr>
+              <a:t> shows it open, and packets are still dropped.</a:t>
+            </a:r>
+            <a:endParaRPr lang="en-US" sz="1150" dirty="0"/>
+          </a:p>
+          <a:p>
+            <a:pPr marL="0" indent="0">
               <a:spcAft>
                 <a:spcPts val="400"/>
               </a:spcAft>
@@ -4772,210 +4525,47 @@
             <a:r>
               <a:rPr lang="en-US" sz="1150" dirty="0">
                 <a:solidFill>
+                  <a:srgbClr val="565C6B"/>
+                </a:solidFill>
+                <a:latin typeface="Arial" pitchFamily="34" charset="0"/>
+                <a:ea typeface="Arial" pitchFamily="34" charset="-122"/>
+                <a:cs typeface="Arial" pitchFamily="34" charset="-120"/>
+              </a:rPr>
+              <a:t>The playbook deletes those rules </a:t>
+            </a:r>
+            <a:r>
+              <a:rPr lang="en-US" sz="1150" b="1" dirty="0">
+                <a:solidFill>
+                  <a:srgbClr val="565C6B"/>
+                </a:solidFill>
+                <a:latin typeface="Arial" pitchFamily="34" charset="0"/>
+                <a:ea typeface="Arial" pitchFamily="34" charset="-122"/>
+                <a:cs typeface="Arial" pitchFamily="34" charset="-120"/>
+              </a:rPr>
+              <a:t>by specification</a:t>
+            </a:r>
+            <a:r>
+              <a:rPr lang="en-US" sz="1150" dirty="0">
+                <a:solidFill>
+                  <a:srgbClr val="565C6B"/>
+                </a:solidFill>
+                <a:latin typeface="Arial" pitchFamily="34" charset="0"/>
+                <a:ea typeface="Arial" pitchFamily="34" charset="-122"/>
+                <a:cs typeface="Arial" pitchFamily="34" charset="-120"/>
+              </a:rPr>
+              <a:t>, not by index (by index removes the wrong rule, the one keeping SSH open), then purges </a:t>
+            </a:r>
+            <a:r>
+              <a:rPr lang="en-US" sz="1150" dirty="0">
+                <a:solidFill>
                   <a:srgbClr val="14161C"/>
                 </a:solidFill>
                 <a:latin typeface="Courier New" pitchFamily="34" charset="0"/>
                 <a:ea typeface="Courier New" pitchFamily="34" charset="-122"/>
                 <a:cs typeface="Courier New" pitchFamily="34" charset="-120"/>
               </a:rPr>
-              <a:t>INPUT</a:t>
-            </a:r>
-            <a:pPr indent="0" marL="0">
-              <a:spcAft>
-                <a:spcPts val="400"/>
-              </a:spcAft>
-              <a:buNone/>
-            </a:pPr>
-            <a:r>
-              <a:rPr lang="en-US" sz="1150" dirty="0">
-                <a:solidFill>
-                  <a:srgbClr val="565C6B"/>
-                </a:solidFill>
-                <a:latin typeface="Arial" pitchFamily="34" charset="0"/>
-                <a:ea typeface="Arial" pitchFamily="34" charset="-122"/>
-                <a:cs typeface="Arial" pitchFamily="34" charset="-120"/>
-              </a:rPr>
-              <a:t> chain in a blanket </a:t>
-            </a:r>
-            <a:pPr indent="0" marL="0">
-              <a:spcAft>
-                <a:spcPts val="400"/>
-              </a:spcAft>
-              <a:buNone/>
-            </a:pPr>
-            <a:r>
-              <a:rPr lang="en-US" sz="1150" dirty="0">
-                <a:solidFill>
-                  <a:srgbClr val="14161C"/>
-                </a:solidFill>
-                <a:latin typeface="Courier New" pitchFamily="34" charset="0"/>
-                <a:ea typeface="Courier New" pitchFamily="34" charset="-122"/>
-                <a:cs typeface="Courier New" pitchFamily="34" charset="-120"/>
-              </a:rPr>
-              <a:t>REJECT</a:t>
-            </a:r>
-            <a:pPr indent="0" marL="0">
-              <a:spcAft>
-                <a:spcPts val="400"/>
-              </a:spcAft>
-              <a:buNone/>
-            </a:pPr>
-            <a:r>
-              <a:rPr lang="en-US" sz="1150" dirty="0">
-                <a:solidFill>
-                  <a:srgbClr val="565C6B"/>
-                </a:solidFill>
-                <a:latin typeface="Arial" pitchFamily="34" charset="0"/>
-                <a:ea typeface="Arial" pitchFamily="34" charset="-122"/>
-                <a:cs typeface="Arial" pitchFamily="34" charset="-120"/>
-              </a:rPr>
-              <a:t>. ufw writes to a different chain, so </a:t>
-            </a:r>
-            <a:pPr indent="0" marL="0">
-              <a:spcAft>
-                <a:spcPts val="400"/>
-              </a:spcAft>
-              <a:buNone/>
-            </a:pPr>
-            <a:r>
-              <a:rPr lang="en-US" sz="1150" dirty="0">
-                <a:solidFill>
-                  <a:srgbClr val="14161C"/>
-                </a:solidFill>
-                <a:latin typeface="Courier New" pitchFamily="34" charset="0"/>
-                <a:ea typeface="Courier New" pitchFamily="34" charset="-122"/>
-                <a:cs typeface="Courier New" pitchFamily="34" charset="-120"/>
-              </a:rPr>
-              <a:t>ufw allow 443</a:t>
-            </a:r>
-            <a:pPr indent="0" marL="0">
-              <a:spcAft>
-                <a:spcPts val="400"/>
-              </a:spcAft>
-              <a:buNone/>
-            </a:pPr>
-            <a:r>
-              <a:rPr lang="en-US" sz="1150" dirty="0">
-                <a:solidFill>
-                  <a:srgbClr val="565C6B"/>
-                </a:solidFill>
-                <a:latin typeface="Arial" pitchFamily="34" charset="0"/>
-                <a:ea typeface="Arial" pitchFamily="34" charset="-122"/>
-                <a:cs typeface="Arial" pitchFamily="34" charset="-120"/>
-              </a:rPr>
-              <a:t> succeeds, </a:t>
-            </a:r>
-            <a:pPr indent="0" marL="0">
-              <a:spcAft>
-                <a:spcPts val="400"/>
-              </a:spcAft>
-              <a:buNone/>
-            </a:pPr>
-            <a:r>
-              <a:rPr lang="en-US" sz="1150" dirty="0">
-                <a:solidFill>
-                  <a:srgbClr val="14161C"/>
-                </a:solidFill>
-                <a:latin typeface="Courier New" pitchFamily="34" charset="0"/>
-                <a:ea typeface="Courier New" pitchFamily="34" charset="-122"/>
-                <a:cs typeface="Courier New" pitchFamily="34" charset="-120"/>
-              </a:rPr>
-              <a:t>ufw status</a:t>
-            </a:r>
-            <a:pPr indent="0" marL="0">
-              <a:spcAft>
-                <a:spcPts val="400"/>
-              </a:spcAft>
-              <a:buNone/>
-            </a:pPr>
-            <a:r>
-              <a:rPr lang="en-US" sz="1150" dirty="0">
-                <a:solidFill>
-                  <a:srgbClr val="565C6B"/>
-                </a:solidFill>
-                <a:latin typeface="Arial" pitchFamily="34" charset="0"/>
-                <a:ea typeface="Arial" pitchFamily="34" charset="-122"/>
-                <a:cs typeface="Arial" pitchFamily="34" charset="-120"/>
-              </a:rPr>
-              <a:t> shows it open, and packets are still dropped.</a:t>
-            </a:r>
-            <a:endParaRPr lang="en-US" sz="1150" dirty="0"/>
-          </a:p>
-          <a:p>
-            <a:pPr indent="0" marL="0">
-              <a:spcAft>
-                <a:spcPts val="400"/>
-              </a:spcAft>
-              <a:buNone/>
-            </a:pPr>
-            <a:r>
-              <a:rPr lang="en-US" sz="1150" dirty="0">
-                <a:solidFill>
-                  <a:srgbClr val="565C6B"/>
-                </a:solidFill>
-                <a:latin typeface="Arial" pitchFamily="34" charset="0"/>
-                <a:ea typeface="Arial" pitchFamily="34" charset="-122"/>
-                <a:cs typeface="Arial" pitchFamily="34" charset="-120"/>
-              </a:rPr>
-              <a:t>The playbook deletes those rules </a:t>
-            </a:r>
-            <a:pPr indent="0" marL="0">
-              <a:spcAft>
-                <a:spcPts val="400"/>
-              </a:spcAft>
-              <a:buNone/>
-            </a:pPr>
-            <a:r>
-              <a:rPr lang="en-US" sz="1150" b="1" dirty="0">
-                <a:solidFill>
-                  <a:srgbClr val="565C6B"/>
-                </a:solidFill>
-                <a:latin typeface="Arial" pitchFamily="34" charset="0"/>
-                <a:ea typeface="Arial" pitchFamily="34" charset="-122"/>
-                <a:cs typeface="Arial" pitchFamily="34" charset="-120"/>
-              </a:rPr>
-              <a:t>by specification</a:t>
-            </a:r>
-            <a:pPr indent="0" marL="0">
-              <a:spcAft>
-                <a:spcPts val="400"/>
-              </a:spcAft>
-              <a:buNone/>
-            </a:pPr>
-            <a:r>
-              <a:rPr lang="en-US" sz="1150" dirty="0">
-                <a:solidFill>
-                  <a:srgbClr val="565C6B"/>
-                </a:solidFill>
-                <a:latin typeface="Arial" pitchFamily="34" charset="0"/>
-                <a:ea typeface="Arial" pitchFamily="34" charset="-122"/>
-                <a:cs typeface="Arial" pitchFamily="34" charset="-120"/>
-              </a:rPr>
-              <a:t>, not by index (by index removes the wrong rule, the one keeping SSH open), then purges </a:t>
-            </a:r>
-            <a:pPr indent="0" marL="0">
-              <a:spcAft>
-                <a:spcPts val="400"/>
-              </a:spcAft>
-              <a:buNone/>
-            </a:pPr>
-            <a:r>
-              <a:rPr lang="en-US" sz="1150" dirty="0">
-                <a:solidFill>
-                  <a:srgbClr val="14161C"/>
-                </a:solidFill>
-                <a:latin typeface="Courier New" pitchFamily="34" charset="0"/>
-                <a:ea typeface="Courier New" pitchFamily="34" charset="-122"/>
-                <a:cs typeface="Courier New" pitchFamily="34" charset="-120"/>
-              </a:rPr>
               <a:t>iptables-persistent</a:t>
             </a:r>
-            <a:pPr indent="0" marL="0">
-              <a:spcAft>
-                <a:spcPts val="400"/>
-              </a:spcAft>
-              <a:buNone/>
-            </a:pPr>
             <a:r>
               <a:rPr lang="en-US" sz="1150" dirty="0">
                 <a:solidFill>
@@ -5017,7 +4607,7 @@
             <a:prstDash val="solid"/>
           </a:ln>
           <a:effectLst>
-            <a:outerShdw sx="100000" sy="100000" kx="0" ky="0" algn="bl" rotWithShape="0" blurRad="101600" dist="25400" dir="5400000">
+            <a:outerShdw blurRad="101600" dist="25400" dir="5400000" algn="bl" rotWithShape="0">
               <a:srgbClr val="14161C">
                 <a:alpha val="8000"/>
               </a:srgbClr>
@@ -5046,7 +4636,7 @@
           <a:bodyPr wrap="square" lIns="0" tIns="0" rIns="0" bIns="0" rtlCol="0" anchor="t"/>
           <a:lstStyle/>
           <a:p>
-            <a:pPr indent="0" marL="0">
+            <a:pPr marL="0" indent="0">
               <a:buNone/>
             </a:pPr>
             <a:r>
@@ -5085,7 +4675,7 @@
           <a:bodyPr wrap="square" lIns="0" tIns="0" rIns="0" bIns="0" rtlCol="0" anchor="t"/>
           <a:lstStyle/>
           <a:p>
-            <a:pPr indent="0" marL="0">
+            <a:pPr marL="0" indent="0">
               <a:spcAft>
                 <a:spcPts val="400"/>
               </a:spcAft>
@@ -5132,7 +4722,7 @@
             <a:prstDash val="solid"/>
           </a:ln>
           <a:effectLst>
-            <a:outerShdw sx="100000" sy="100000" kx="0" ky="0" algn="bl" rotWithShape="0" blurRad="101600" dist="25400" dir="5400000">
+            <a:outerShdw blurRad="101600" dist="25400" dir="5400000" algn="bl" rotWithShape="0">
               <a:srgbClr val="14161C">
                 <a:alpha val="8000"/>
               </a:srgbClr>
@@ -5161,7 +4751,7 @@
           <a:bodyPr wrap="square" lIns="0" tIns="0" rIns="0" bIns="0" rtlCol="0" anchor="t"/>
           <a:lstStyle/>
           <a:p>
-            <a:pPr indent="0" marL="0">
+            <a:pPr marL="0" indent="0">
               <a:buNone/>
             </a:pPr>
             <a:r>
@@ -5200,7 +4790,7 @@
           <a:bodyPr wrap="square" lIns="0" tIns="0" rIns="0" bIns="0" rtlCol="0" anchor="t"/>
           <a:lstStyle/>
           <a:p>
-            <a:pPr indent="0" marL="0">
+            <a:pPr marL="0" indent="0">
               <a:spcAft>
                 <a:spcPts val="400"/>
               </a:spcAft>
@@ -5217,12 +4807,6 @@
               </a:rPr>
               <a:t>With </a:t>
             </a:r>
-            <a:pPr indent="0" marL="0">
-              <a:spcAft>
-                <a:spcPts val="400"/>
-              </a:spcAft>
-              <a:buNone/>
-            </a:pPr>
             <a:r>
               <a:rPr lang="en-US" sz="1100" dirty="0">
                 <a:solidFill>
@@ -5234,12 +4818,6 @@
               </a:rPr>
               <a:t>auto_https off</a:t>
             </a:r>
-            <a:pPr indent="0" marL="0">
-              <a:spcAft>
-                <a:spcPts val="400"/>
-              </a:spcAft>
-              <a:buNone/>
-            </a:pPr>
             <a:r>
               <a:rPr lang="en-US" sz="1100" dirty="0">
                 <a:solidFill>
@@ -5251,12 +4829,6 @@
               </a:rPr>
               <a:t>, a bare hostname still listens on 443 and never saw nginx’s plain HTTP. Pinned </a:t>
             </a:r>
-            <a:pPr indent="0" marL="0">
-              <a:spcAft>
-                <a:spcPts val="400"/>
-              </a:spcAft>
-              <a:buNone/>
-            </a:pPr>
             <a:r>
               <a:rPr lang="en-US" sz="1100" dirty="0">
                 <a:solidFill>
@@ -5268,12 +4840,6 @@
               </a:rPr>
               <a:t>http://</a:t>
             </a:r>
-            <a:pPr indent="0" marL="0">
-              <a:spcAft>
-                <a:spcPts val="400"/>
-              </a:spcAft>
-              <a:buNone/>
-            </a:pPr>
             <a:r>
               <a:rPr lang="en-US" sz="1100" dirty="0">
                 <a:solidFill>
@@ -5315,7 +4881,7 @@
             <a:prstDash val="solid"/>
           </a:ln>
           <a:effectLst>
-            <a:outerShdw sx="100000" sy="100000" kx="0" ky="0" algn="bl" rotWithShape="0" blurRad="101600" dist="25400" dir="5400000">
+            <a:outerShdw blurRad="101600" dist="25400" dir="5400000" algn="bl" rotWithShape="0">
               <a:srgbClr val="14161C">
                 <a:alpha val="8000"/>
               </a:srgbClr>
@@ -5344,7 +4910,7 @@
           <a:bodyPr wrap="square" lIns="0" tIns="0" rIns="0" bIns="0" rtlCol="0" anchor="t"/>
           <a:lstStyle/>
           <a:p>
-            <a:pPr indent="0" marL="0">
+            <a:pPr marL="0" indent="0">
               <a:buNone/>
             </a:pPr>
             <a:r>
@@ -5383,7 +4949,7 @@
           <a:bodyPr wrap="square" lIns="0" tIns="0" rIns="0" bIns="0" rtlCol="0" anchor="t"/>
           <a:lstStyle/>
           <a:p>
-            <a:pPr indent="0" marL="0">
+            <a:pPr marL="0" indent="0">
               <a:spcAft>
                 <a:spcPts val="400"/>
               </a:spcAft>
@@ -5400,12 +4966,6 @@
               </a:rPr>
               <a:t>Raw paths mint a series per project or per scanner probe. The label is the route template; misses go to </a:t>
             </a:r>
-            <a:pPr indent="0" marL="0">
-              <a:spcAft>
-                <a:spcPts val="400"/>
-              </a:spcAft>
-              <a:buNone/>
-            </a:pPr>
             <a:r>
               <a:rPr lang="en-US" sz="1100" dirty="0">
                 <a:solidFill>
@@ -5417,12 +4977,6 @@
               </a:rPr>
               <a:t>&lt;unmatched&gt;</a:t>
             </a:r>
-            <a:pPr indent="0" marL="0">
-              <a:spcAft>
-                <a:spcPts val="400"/>
-              </a:spcAft>
-              <a:buNone/>
-            </a:pPr>
             <a:r>
               <a:rPr lang="en-US" sz="1100" dirty="0">
                 <a:solidFill>
@@ -5464,7 +5018,7 @@
             <a:prstDash val="solid"/>
           </a:ln>
           <a:effectLst>
-            <a:outerShdw sx="100000" sy="100000" kx="0" ky="0" algn="bl" rotWithShape="0" blurRad="101600" dist="25400" dir="5400000">
+            <a:outerShdw blurRad="101600" dist="25400" dir="5400000" algn="bl" rotWithShape="0">
               <a:srgbClr val="14161C">
                 <a:alpha val="8000"/>
               </a:srgbClr>
@@ -5493,7 +5047,7 @@
           <a:bodyPr wrap="square" lIns="0" tIns="0" rIns="0" bIns="0" rtlCol="0" anchor="t"/>
           <a:lstStyle/>
           <a:p>
-            <a:pPr indent="0" marL="0">
+            <a:pPr marL="0" indent="0">
               <a:buNone/>
             </a:pPr>
             <a:r>
@@ -5532,7 +5086,7 @@
           <a:bodyPr wrap="square" lIns="0" tIns="0" rIns="0" bIns="0" rtlCol="0" anchor="t"/>
           <a:lstStyle/>
           <a:p>
-            <a:pPr indent="0" marL="0">
+            <a:pPr marL="0" indent="0">
               <a:spcAft>
                 <a:spcPts val="400"/>
               </a:spcAft>
@@ -5549,12 +5103,6 @@
               </a:rPr>
               <a:t>No 5xx means an empty vector, and empty ÷ anything is empty: "No data". Fixed with </a:t>
             </a:r>
-            <a:pPr indent="0" marL="0">
-              <a:spcAft>
-                <a:spcPts val="400"/>
-              </a:spcAft>
-              <a:buNone/>
-            </a:pPr>
             <a:r>
               <a:rPr lang="en-US" sz="1100" dirty="0">
                 <a:solidFill>
@@ -5566,12 +5114,6 @@
               </a:rPr>
               <a:t>or vector(0)</a:t>
             </a:r>
-            <a:pPr indent="0" marL="0">
-              <a:spcAft>
-                <a:spcPts val="400"/>
-              </a:spcAft>
-              <a:buNone/>
-            </a:pPr>
             <a:r>
               <a:rPr lang="en-US" sz="1100" dirty="0">
                 <a:solidFill>
@@ -5613,7 +5155,7 @@
             <a:prstDash val="solid"/>
           </a:ln>
           <a:effectLst>
-            <a:outerShdw sx="100000" sy="100000" kx="0" ky="0" algn="bl" rotWithShape="0" blurRad="101600" dist="25400" dir="5400000">
+            <a:outerShdw blurRad="101600" dist="25400" dir="5400000" algn="bl" rotWithShape="0">
               <a:srgbClr val="14161C">
                 <a:alpha val="8000"/>
               </a:srgbClr>
@@ -5642,7 +5184,7 @@
           <a:bodyPr wrap="square" lIns="0" tIns="0" rIns="0" bIns="0" rtlCol="0" anchor="t"/>
           <a:lstStyle/>
           <a:p>
-            <a:pPr indent="0" marL="0">
+            <a:pPr marL="0" indent="0">
               <a:buNone/>
             </a:pPr>
             <a:r>
@@ -5681,7 +5223,7 @@
           <a:bodyPr wrap="square" lIns="0" tIns="0" rIns="0" bIns="0" rtlCol="0" anchor="t"/>
           <a:lstStyle/>
           <a:p>
-            <a:pPr indent="0" marL="0">
+            <a:pPr marL="0" indent="0">
               <a:spcAft>
                 <a:spcPts val="400"/>
               </a:spcAft>
@@ -5698,12 +5240,6 @@
               </a:rPr>
               <a:t>Runners are amd64, the VM aarch64: amd64 images die with </a:t>
             </a:r>
-            <a:pPr indent="0" marL="0">
-              <a:spcAft>
-                <a:spcPts val="400"/>
-              </a:spcAft>
-              <a:buNone/>
-            </a:pPr>
             <a:r>
               <a:rPr lang="en-US" sz="1100" dirty="0">
                 <a:solidFill>
@@ -5715,12 +5251,6 @@
               </a:rPr>
               <a:t>exec format error</a:t>
             </a:r>
-            <a:pPr indent="0" marL="0">
-              <a:spcAft>
-                <a:spcPts val="400"/>
-              </a:spcAft>
-              <a:buNone/>
-            </a:pPr>
             <a:r>
               <a:rPr lang="en-US" sz="1100" dirty="0">
                 <a:solidFill>
@@ -5752,6 +5282,7 @@
         <a:solidFill>
           <a:srgbClr val="FBFBFD"/>
         </a:solidFill>
+        <a:effectLst/>
       </p:bgPr>
     </p:bg>
     <p:spTree>
@@ -5770,14 +5301,14 @@
       </p:grpSpPr>
       <p:pic>
         <p:nvPicPr>
-          <p:cNvPr id="2" name="Image 0" descr="/tmp/claude-0/-home-user-ForgeFlow/c54c4f28-0214-5817-a71a-61a1132558a0/scratchpad/img/mark.png">    </p:cNvPr>
+          <p:cNvPr id="2" name="Image 0" descr="/tmp/claude-0/-home-user-ForgeFlow/c54c4f28-0214-5817-a71a-61a1132558a0/scratchpad/img/mark.png"/>
           <p:cNvPicPr>
             <a:picLocks noChangeAspect="1"/>
           </p:cNvPicPr>
           <p:nvPr/>
         </p:nvPicPr>
         <p:blipFill>
-          <a:blip r:embed="rId1"/>
+          <a:blip r:embed="rId3"/>
           <a:stretch>
             <a:fillRect/>
           </a:stretch>
@@ -5813,7 +5344,7 @@
           <a:bodyPr wrap="square" lIns="0" tIns="0" rIns="0" bIns="0" rtlCol="0" anchor="ctr"/>
           <a:lstStyle/>
           <a:p>
-            <a:pPr indent="0" marL="0">
+            <a:pPr marL="0" indent="0">
               <a:buNone/>
             </a:pPr>
             <a:r>
@@ -5827,9 +5358,6 @@
               </a:rPr>
               <a:t>ForgeFlow</a:t>
             </a:r>
-            <a:pPr indent="0" marL="0">
-              <a:buNone/>
-            </a:pPr>
             <a:r>
               <a:rPr lang="en-US" sz="1100" dirty="0">
                 <a:solidFill>
@@ -5866,7 +5394,7 @@
           <a:bodyPr wrap="square" lIns="0" tIns="0" rIns="0" bIns="0" rtlCol="0" anchor="ctr"/>
           <a:lstStyle/>
           <a:p>
-            <a:pPr algn="r" indent="0" marL="0">
+            <a:pPr marL="0" indent="0" algn="r">
               <a:buNone/>
             </a:pPr>
             <a:r>
@@ -5905,11 +5433,11 @@
           <a:bodyPr wrap="square" lIns="0" tIns="0" rIns="0" bIns="0" rtlCol="0" anchor="ctr"/>
           <a:lstStyle/>
           <a:p>
-            <a:pPr indent="0" marL="0">
-              <a:buNone/>
-            </a:pPr>
-            <a:r>
-              <a:rPr lang="en-US" sz="1050" b="1" spc="300" kern="0" dirty="0">
+            <a:pPr marL="0" indent="0">
+              <a:buNone/>
+            </a:pPr>
+            <a:r>
+              <a:rPr lang="en-US" sz="1050" b="1" kern="0" spc="300" dirty="0">
                 <a:solidFill>
                   <a:srgbClr val="5457E0"/>
                 </a:solidFill>
@@ -5944,7 +5472,7 @@
           <a:bodyPr wrap="square" lIns="0" tIns="0" rIns="0" bIns="0" rtlCol="0" anchor="ctr"/>
           <a:lstStyle/>
           <a:p>
-            <a:pPr indent="0" marL="0">
+            <a:pPr marL="0" indent="0">
               <a:buNone/>
             </a:pPr>
             <a:r>
@@ -5958,9 +5486,6 @@
               </a:rPr>
               <a:t>Validate by execution,</a:t>
             </a:r>
-            <a:pPr indent="0" marL="0">
-              <a:buNone/>
-            </a:pPr>
             <a:r>
               <a:rPr lang="en-US" sz="3000" b="1" dirty="0">
                 <a:solidFill>
@@ -6002,7 +5527,7 @@
             <a:prstDash val="solid"/>
           </a:ln>
           <a:effectLst>
-            <a:outerShdw sx="100000" sy="100000" kx="0" ky="0" algn="bl" rotWithShape="0" blurRad="101600" dist="25400" dir="5400000">
+            <a:outerShdw blurRad="101600" dist="25400" dir="5400000" algn="bl" rotWithShape="0">
               <a:srgbClr val="14161C">
                 <a:alpha val="8000"/>
               </a:srgbClr>
@@ -6031,7 +5556,7 @@
           <a:bodyPr wrap="square" lIns="0" tIns="0" rIns="0" bIns="0" rtlCol="0" anchor="t"/>
           <a:lstStyle/>
           <a:p>
-            <a:pPr indent="0" marL="0">
+            <a:pPr marL="0" indent="0">
               <a:buNone/>
             </a:pPr>
             <a:r>
@@ -6045,9 +5570,6 @@
               </a:rPr>
               <a:t>A throwaway k3s cluster and a real Prometheus took about an hour to set up and found </a:t>
             </a:r>
-            <a:pPr indent="0" marL="0">
-              <a:buNone/>
-            </a:pPr>
             <a:r>
               <a:rPr lang="en-US" sz="1300" b="1" dirty="0">
                 <a:solidFill>
@@ -6059,9 +5581,6 @@
               </a:rPr>
               <a:t>five genuine bugs</a:t>
             </a:r>
-            <a:pPr indent="0" marL="0">
-              <a:buNone/>
-            </a:pPr>
             <a:r>
               <a:rPr lang="en-US" sz="1300" dirty="0">
                 <a:solidFill>
@@ -6098,7 +5617,7 @@
           <a:bodyPr wrap="square" lIns="0" tIns="0" rIns="0" bIns="0" rtlCol="0" anchor="t"/>
           <a:lstStyle/>
           <a:p>
-            <a:pPr indent="0" marL="0">
+            <a:pPr marL="0" indent="0">
               <a:buNone/>
             </a:pPr>
             <a:r>
@@ -6164,7 +5683,7 @@
           <a:bodyPr wrap="square" lIns="0" tIns="0" rIns="0" bIns="0" rtlCol="0" anchor="ctr"/>
           <a:lstStyle/>
           <a:p>
-            <a:pPr algn="ctr" indent="0" marL="0">
+            <a:pPr marL="0" indent="0" algn="ctr">
               <a:buNone/>
             </a:pPr>
             <a:r>
@@ -6203,7 +5722,7 @@
           <a:bodyPr wrap="square" lIns="0" tIns="0" rIns="0" bIns="0" rtlCol="0" anchor="t"/>
           <a:lstStyle/>
           <a:p>
-            <a:pPr algn="ctr" indent="0" marL="0">
+            <a:pPr marL="0" indent="0" algn="ctr">
               <a:buNone/>
             </a:pPr>
             <a:r>
@@ -6269,7 +5788,7 @@
           <a:bodyPr wrap="square" lIns="0" tIns="0" rIns="0" bIns="0" rtlCol="0" anchor="ctr"/>
           <a:lstStyle/>
           <a:p>
-            <a:pPr algn="ctr" indent="0" marL="0">
+            <a:pPr marL="0" indent="0" algn="ctr">
               <a:buNone/>
             </a:pPr>
             <a:r>
@@ -6308,7 +5827,7 @@
           <a:bodyPr wrap="square" lIns="0" tIns="0" rIns="0" bIns="0" rtlCol="0" anchor="t"/>
           <a:lstStyle/>
           <a:p>
-            <a:pPr algn="ctr" indent="0" marL="0">
+            <a:pPr marL="0" indent="0" algn="ctr">
               <a:buNone/>
             </a:pPr>
             <a:r>
@@ -6374,7 +5893,7 @@
           <a:bodyPr wrap="square" lIns="0" tIns="0" rIns="0" bIns="0" rtlCol="0" anchor="ctr"/>
           <a:lstStyle/>
           <a:p>
-            <a:pPr algn="ctr" indent="0" marL="0">
+            <a:pPr marL="0" indent="0" algn="ctr">
               <a:buNone/>
             </a:pPr>
             <a:r>
@@ -6413,7 +5932,7 @@
           <a:bodyPr wrap="square" lIns="0" tIns="0" rIns="0" bIns="0" rtlCol="0" anchor="t"/>
           <a:lstStyle/>
           <a:p>
-            <a:pPr algn="ctr" indent="0" marL="0">
+            <a:pPr marL="0" indent="0" algn="ctr">
               <a:buNone/>
             </a:pPr>
             <a:r>
@@ -6457,7 +5976,7 @@
             <a:prstDash val="solid"/>
           </a:ln>
           <a:effectLst>
-            <a:outerShdw sx="100000" sy="100000" kx="0" ky="0" algn="bl" rotWithShape="0" blurRad="101600" dist="25400" dir="5400000">
+            <a:outerShdw blurRad="101600" dist="25400" dir="5400000" algn="bl" rotWithShape="0">
               <a:srgbClr val="14161C">
                 <a:alpha val="8000"/>
               </a:srgbClr>
@@ -6486,7 +6005,7 @@
           <a:bodyPr wrap="square" lIns="0" tIns="0" rIns="0" bIns="0" rtlCol="0" anchor="t"/>
           <a:lstStyle/>
           <a:p>
-            <a:pPr indent="0" marL="0">
+            <a:pPr marL="0" indent="0">
               <a:buNone/>
             </a:pPr>
             <a:r>
@@ -6525,7 +6044,7 @@
           <a:bodyPr wrap="square" lIns="0" tIns="0" rIns="0" bIns="0" rtlCol="0" anchor="t"/>
           <a:lstStyle/>
           <a:p>
-            <a:pPr indent="0" marL="0">
+            <a:pPr marL="0" indent="0">
               <a:spcAft>
                 <a:spcPts val="400"/>
               </a:spcAft>
@@ -6542,12 +6061,6 @@
               </a:rPr>
               <a:t>A rolling update that looks fine proves nothing. </a:t>
             </a:r>
-            <a:pPr indent="0" marL="0">
-              <a:spcAft>
-                <a:spcPts val="400"/>
-              </a:spcAft>
-              <a:buNone/>
-            </a:pPr>
             <a:r>
               <a:rPr lang="en-US" sz="1200" b="1" dirty="0">
                 <a:solidFill>
@@ -6559,12 +6072,6 @@
               </a:rPr>
               <a:t>807 requests, 0 failures</a:t>
             </a:r>
-            <a:pPr indent="0" marL="0">
-              <a:spcAft>
-                <a:spcPts val="400"/>
-              </a:spcAft>
-              <a:buNone/>
-            </a:pPr>
             <a:r>
               <a:rPr lang="en-US" sz="1200" dirty="0">
                 <a:solidFill>
@@ -6606,7 +6113,7 @@
             <a:prstDash val="solid"/>
           </a:ln>
           <a:effectLst>
-            <a:outerShdw sx="100000" sy="100000" kx="0" ky="0" algn="bl" rotWithShape="0" blurRad="101600" dist="25400" dir="5400000">
+            <a:outerShdw blurRad="101600" dist="25400" dir="5400000" algn="bl" rotWithShape="0">
               <a:srgbClr val="14161C">
                 <a:alpha val="8000"/>
               </a:srgbClr>
@@ -6635,7 +6142,7 @@
           <a:bodyPr wrap="square" lIns="0" tIns="0" rIns="0" bIns="0" rtlCol="0" anchor="t"/>
           <a:lstStyle/>
           <a:p>
-            <a:pPr indent="0" marL="0">
+            <a:pPr marL="0" indent="0">
               <a:buNone/>
             </a:pPr>
             <a:r>
@@ -6674,7 +6181,7 @@
           <a:bodyPr wrap="square" lIns="0" tIns="0" rIns="0" bIns="0" rtlCol="0" anchor="t"/>
           <a:lstStyle/>
           <a:p>
-            <a:pPr indent="0" marL="0">
+            <a:pPr marL="0" indent="0">
               <a:spcAft>
                 <a:spcPts val="400"/>
               </a:spcAft>
@@ -6691,12 +6198,6 @@
               </a:rPr>
               <a:t>kubectl set image</a:t>
             </a:r>
-            <a:pPr indent="0" marL="0">
-              <a:spcAft>
-                <a:spcPts val="400"/>
-              </a:spcAft>
-              <a:buNone/>
-            </a:pPr>
             <a:r>
               <a:rPr lang="en-US" sz="1200" dirty="0">
                 <a:solidFill>
@@ -6708,12 +6209,6 @@
               </a:rPr>
               <a:t> and </a:t>
             </a:r>
-            <a:pPr indent="0" marL="0">
-              <a:spcAft>
-                <a:spcPts val="400"/>
-              </a:spcAft>
-              <a:buNone/>
-            </a:pPr>
             <a:r>
               <a:rPr lang="en-US" sz="1200" dirty="0">
                 <a:solidFill>
@@ -6725,12 +6220,6 @@
               </a:rPr>
               <a:t>compose up -d</a:t>
             </a:r>
-            <a:pPr indent="0" marL="0">
-              <a:spcAft>
-                <a:spcPts val="400"/>
-              </a:spcAft>
-              <a:buNone/>
-            </a:pPr>
             <a:r>
               <a:rPr lang="en-US" sz="1200" dirty="0">
                 <a:solidFill>
@@ -6772,7 +6261,7 @@
             <a:prstDash val="solid"/>
           </a:ln>
           <a:effectLst>
-            <a:outerShdw sx="100000" sy="100000" kx="0" ky="0" algn="bl" rotWithShape="0" blurRad="101600" dist="25400" dir="5400000">
+            <a:outerShdw blurRad="101600" dist="25400" dir="5400000" algn="bl" rotWithShape="0">
               <a:srgbClr val="14161C">
                 <a:alpha val="8000"/>
               </a:srgbClr>
@@ -6801,7 +6290,7 @@
           <a:bodyPr wrap="square" lIns="0" tIns="0" rIns="0" bIns="0" rtlCol="0" anchor="t"/>
           <a:lstStyle/>
           <a:p>
-            <a:pPr indent="0" marL="0">
+            <a:pPr marL="0" indent="0">
               <a:buNone/>
             </a:pPr>
             <a:r>
@@ -6840,7 +6329,7 @@
           <a:bodyPr wrap="square" lIns="0" tIns="0" rIns="0" bIns="0" rtlCol="0" anchor="t"/>
           <a:lstStyle/>
           <a:p>
-            <a:pPr indent="0" marL="0">
+            <a:pPr marL="0" indent="0">
               <a:spcAft>
                 <a:spcPts val="400"/>
               </a:spcAft>
@@ -6857,12 +6346,6 @@
               </a:rPr>
               <a:t>Regenerating </a:t>
             </a:r>
-            <a:pPr indent="0" marL="0">
-              <a:spcAft>
-                <a:spcPts val="400"/>
-              </a:spcAft>
-              <a:buNone/>
-            </a:pPr>
             <a:r>
               <a:rPr lang="en-US" sz="1200" dirty="0">
                 <a:solidFill>
@@ -6874,12 +6357,6 @@
               </a:rPr>
               <a:t>FERNET_KEY</a:t>
             </a:r>
-            <a:pPr indent="0" marL="0">
-              <a:spcAft>
-                <a:spcPts val="400"/>
-              </a:spcAft>
-              <a:buNone/>
-            </a:pPr>
             <a:r>
               <a:rPr lang="en-US" sz="1200" dirty="0">
                 <a:solidFill>
@@ -6921,7 +6398,7 @@
             <a:prstDash val="solid"/>
           </a:ln>
           <a:effectLst>
-            <a:outerShdw sx="100000" sy="100000" kx="0" ky="0" algn="bl" rotWithShape="0" blurRad="101600" dist="25400" dir="5400000">
+            <a:outerShdw blurRad="101600" dist="25400" dir="5400000" algn="bl" rotWithShape="0">
               <a:srgbClr val="14161C">
                 <a:alpha val="8000"/>
               </a:srgbClr>
@@ -6950,7 +6427,7 @@
           <a:bodyPr wrap="square" lIns="0" tIns="0" rIns="0" bIns="0" rtlCol="0" anchor="t"/>
           <a:lstStyle/>
           <a:p>
-            <a:pPr indent="0" marL="0">
+            <a:pPr marL="0" indent="0">
               <a:buNone/>
             </a:pPr>
             <a:r>
@@ -6989,7 +6466,7 @@
           <a:bodyPr wrap="square" lIns="0" tIns="0" rIns="0" bIns="0" rtlCol="0" anchor="t"/>
           <a:lstStyle/>
           <a:p>
-            <a:pPr indent="0" marL="0">
+            <a:pPr marL="0" indent="0">
               <a:spcAft>
                 <a:spcPts val="400"/>
               </a:spcAft>
@@ -7006,12 +6483,6 @@
               </a:rPr>
               <a:t>The VM already runs another project. The nginx role writes exactly one file, never touches </a:t>
             </a:r>
-            <a:pPr indent="0" marL="0">
-              <a:spcAft>
-                <a:spcPts val="400"/>
-              </a:spcAft>
-              <a:buNone/>
-            </a:pPr>
             <a:r>
               <a:rPr lang="en-US" sz="1200" dirty="0">
                 <a:solidFill>
@@ -7023,12 +6494,6 @@
               </a:rPr>
               <a:t>nginx.conf</a:t>
             </a:r>
-            <a:pPr indent="0" marL="0">
-              <a:spcAft>
-                <a:spcPts val="400"/>
-              </a:spcAft>
-              <a:buNone/>
-            </a:pPr>
             <a:r>
               <a:rPr lang="en-US" sz="1200" dirty="0">
                 <a:solidFill>
@@ -7060,6 +6525,7 @@
         <a:solidFill>
           <a:srgbClr val="FBFBFD"/>
         </a:solidFill>
+        <a:effectLst/>
       </p:bgPr>
     </p:bg>
     <p:spTree>
@@ -7078,14 +6544,14 @@
       </p:grpSpPr>
       <p:pic>
         <p:nvPicPr>
-          <p:cNvPr id="2" name="Image 0" descr="/tmp/claude-0/-home-user-ForgeFlow/c54c4f28-0214-5817-a71a-61a1132558a0/scratchpad/img/mark.png">    </p:cNvPr>
+          <p:cNvPr id="2" name="Image 0" descr="/tmp/claude-0/-home-user-ForgeFlow/c54c4f28-0214-5817-a71a-61a1132558a0/scratchpad/img/mark.png"/>
           <p:cNvPicPr>
             <a:picLocks noChangeAspect="1"/>
           </p:cNvPicPr>
           <p:nvPr/>
         </p:nvPicPr>
         <p:blipFill>
-          <a:blip r:embed="rId1"/>
+          <a:blip r:embed="rId3"/>
           <a:stretch>
             <a:fillRect/>
           </a:stretch>
@@ -7121,7 +6587,7 @@
           <a:bodyPr wrap="square" lIns="0" tIns="0" rIns="0" bIns="0" rtlCol="0" anchor="ctr"/>
           <a:lstStyle/>
           <a:p>
-            <a:pPr indent="0" marL="0">
+            <a:pPr marL="0" indent="0">
               <a:buNone/>
             </a:pPr>
             <a:r>
@@ -7135,9 +6601,6 @@
               </a:rPr>
               <a:t>ForgeFlow</a:t>
             </a:r>
-            <a:pPr indent="0" marL="0">
-              <a:buNone/>
-            </a:pPr>
             <a:r>
               <a:rPr lang="en-US" sz="1100" dirty="0">
                 <a:solidFill>
@@ -7174,7 +6637,7 @@
           <a:bodyPr wrap="square" lIns="0" tIns="0" rIns="0" bIns="0" rtlCol="0" anchor="ctr"/>
           <a:lstStyle/>
           <a:p>
-            <a:pPr algn="r" indent="0" marL="0">
+            <a:pPr marL="0" indent="0" algn="r">
               <a:buNone/>
             </a:pPr>
             <a:r>
@@ -7213,11 +6676,11 @@
           <a:bodyPr wrap="square" lIns="0" tIns="0" rIns="0" bIns="0" rtlCol="0" anchor="ctr"/>
           <a:lstStyle/>
           <a:p>
-            <a:pPr indent="0" marL="0">
-              <a:buNone/>
-            </a:pPr>
-            <a:r>
-              <a:rPr lang="en-US" sz="1050" b="1" spc="300" kern="0" dirty="0">
+            <a:pPr marL="0" indent="0">
+              <a:buNone/>
+            </a:pPr>
+            <a:r>
+              <a:rPr lang="en-US" sz="1050" b="1" kern="0" spc="300" dirty="0">
                 <a:solidFill>
                   <a:srgbClr val="5457E0"/>
                 </a:solidFill>
@@ -7252,7 +6715,7 @@
           <a:bodyPr wrap="square" lIns="0" tIns="0" rIns="0" bIns="0" rtlCol="0" anchor="ctr"/>
           <a:lstStyle/>
           <a:p>
-            <a:pPr indent="0" marL="0">
+            <a:pPr marL="0" indent="0">
               <a:buNone/>
             </a:pPr>
             <a:r>
@@ -7266,9 +6729,6 @@
               </a:rPr>
               <a:t>Executed,</a:t>
             </a:r>
-            <a:pPr indent="0" marL="0">
-              <a:buNone/>
-            </a:pPr>
             <a:r>
               <a:rPr lang="en-US" sz="3000" b="1" dirty="0">
                 <a:solidFill>
@@ -7310,7 +6770,7 @@
             <a:prstDash val="solid"/>
           </a:ln>
           <a:effectLst>
-            <a:outerShdw sx="100000" sy="100000" kx="0" ky="0" algn="bl" rotWithShape="0" blurRad="101600" dist="25400" dir="5400000">
+            <a:outerShdw blurRad="101600" dist="25400" dir="5400000" algn="bl" rotWithShape="0">
               <a:srgbClr val="14161C">
                 <a:alpha val="8000"/>
               </a:srgbClr>
@@ -7339,7 +6799,7 @@
           <a:bodyPr wrap="square" lIns="0" tIns="0" rIns="0" bIns="0" rtlCol="0" anchor="ctr"/>
           <a:lstStyle/>
           <a:p>
-            <a:pPr indent="0" marL="0">
+            <a:pPr marL="0" indent="0">
               <a:buNone/>
             </a:pPr>
             <a:r>
@@ -7378,7 +6838,7 @@
           <a:bodyPr wrap="square" lIns="0" tIns="0" rIns="0" bIns="0" rtlCol="0" anchor="t"/>
           <a:lstStyle/>
           <a:p>
-            <a:pPr indent="0" marL="0">
+            <a:pPr marL="0" indent="0">
               <a:buNone/>
             </a:pPr>
             <a:r>
@@ -7392,9 +6852,6 @@
               </a:rPr>
               <a:t>Requests served / failures</a:t>
             </a:r>
-            <a:pPr indent="0" marL="0">
-              <a:buNone/>
-            </a:pPr>
             <a:r>
               <a:rPr lang="en-US" sz="1200" dirty="0">
                 <a:solidFill>
@@ -7431,7 +6888,7 @@
           <a:bodyPr wrap="square" lIns="0" tIns="0" rIns="0" bIns="0" rtlCol="0" anchor="t"/>
           <a:lstStyle/>
           <a:p>
-            <a:pPr indent="0" marL="0">
+            <a:pPr marL="0" indent="0">
               <a:buNone/>
             </a:pPr>
             <a:r>
@@ -7445,9 +6902,6 @@
               </a:rPr>
               <a:t>maxUnavailable: 0</a:t>
             </a:r>
-            <a:pPr indent="0" marL="0">
-              <a:buNone/>
-            </a:pPr>
             <a:r>
               <a:rPr lang="en-US" sz="1100" dirty="0">
                 <a:solidFill>
@@ -7511,7 +6965,7 @@
           <a:bodyPr wrap="square" lIns="0" tIns="0" rIns="0" bIns="0" rtlCol="0" anchor="ctr"/>
           <a:lstStyle/>
           <a:p>
-            <a:pPr indent="0" marL="0">
+            <a:pPr marL="0" indent="0">
               <a:buNone/>
             </a:pPr>
             <a:r>
@@ -7550,7 +7004,7 @@
           <a:bodyPr wrap="square" lIns="0" tIns="0" rIns="0" bIns="0" rtlCol="0" anchor="t"/>
           <a:lstStyle/>
           <a:p>
-            <a:pPr indent="0" marL="0">
+            <a:pPr marL="0" indent="0">
               <a:buNone/>
             </a:pPr>
             <a:r>
@@ -7570,7 +7024,7 @@
       </p:sp>
       <p:graphicFrame>
         <p:nvGraphicFramePr>
-          <p:cNvPr id="7" name="Table 0"/>
+          <p:cNvPr id="14" name="Table 0"/>
           <p:cNvGraphicFramePr>
             <a:graphicFrameLocks noGrp="1"/>
           </p:cNvGraphicFramePr>
@@ -7584,16 +7038,34 @@
         </p:nvGraphicFramePr>
         <p:xfrm>
           <a:off x="4800600" y="1783080"/>
-          <a:ext cx="6839712" cy="914400"/>
+          <a:ext cx="6839712" cy="4517136"/>
         </p:xfrm>
         <a:graphic>
           <a:graphicData uri="http://schemas.openxmlformats.org/drawingml/2006/table">
             <a:tbl>
               <a:tblPr/>
               <a:tblGrid>
-                <a:gridCol w="3200400"/>
-                <a:gridCol w="2011680"/>
-                <a:gridCol w="1627632"/>
+                <a:gridCol w="3200400">
+                  <a:extLst>
+                    <a:ext uri="{9D8B030D-6E8A-4147-A177-3AD203B41FA5}">
+                      <a16:colId xmlns:a16="http://schemas.microsoft.com/office/drawing/2014/main" val="20000"/>
+                    </a:ext>
+                  </a:extLst>
+                </a:gridCol>
+                <a:gridCol w="2011680">
+                  <a:extLst>
+                    <a:ext uri="{9D8B030D-6E8A-4147-A177-3AD203B41FA5}">
+                      <a16:colId xmlns:a16="http://schemas.microsoft.com/office/drawing/2014/main" val="20001"/>
+                    </a:ext>
+                  </a:extLst>
+                </a:gridCol>
+                <a:gridCol w="1627632">
+                  <a:extLst>
+                    <a:ext uri="{9D8B030D-6E8A-4147-A177-3AD203B41FA5}">
+                      <a16:colId xmlns:a16="http://schemas.microsoft.com/office/drawing/2014/main" val="20002"/>
+                    </a:ext>
+                  </a:extLst>
+                </a:gridCol>
               </a:tblGrid>
               <a:tr h="347472">
                 <a:tc>
@@ -7601,11 +7073,11 @@
                     <a:bodyPr/>
                     <a:lstStyle/>
                     <a:p>
-                      <a:pPr indent="0" marL="0">
+                      <a:pPr marL="0" indent="0">
                         <a:buNone/>
                       </a:pPr>
                       <a:r>
-                        <a:rPr lang="en-US" sz="950" b="1" spc="100" kern="0" dirty="0">
+                        <a:rPr lang="en-US" sz="950" b="1" kern="0" spc="100" dirty="0">
                           <a:solidFill>
                             <a:srgbClr val="878D9C"/>
                           </a:solidFill>
@@ -7622,7 +7094,7 @@
                       </a:endParaRPr>
                     </a:p>
                   </a:txBody>
-                  <a:tcPr marL="109728" marR="91440" marT="0" marB="0" anchor="ctr">
+                  <a:tcPr marL="109728" marT="0" marB="0" anchor="ctr">
                     <a:lnL w="9525" cap="flat" cmpd="sng" algn="ctr">
                       <a:solidFill>
                         <a:srgbClr val="E2E4EC"/>
@@ -7669,11 +7141,11 @@
                     <a:bodyPr/>
                     <a:lstStyle/>
                     <a:p>
-                      <a:pPr indent="0" marL="0">
+                      <a:pPr marL="0" indent="0">
                         <a:buNone/>
                       </a:pPr>
                       <a:r>
-                        <a:rPr lang="en-US" sz="950" b="1" spc="100" kern="0" dirty="0">
+                        <a:rPr lang="en-US" sz="950" b="1" kern="0" spc="100" dirty="0">
                           <a:solidFill>
                             <a:srgbClr val="878D9C"/>
                           </a:solidFill>
@@ -7690,7 +7162,7 @@
                       </a:endParaRPr>
                     </a:p>
                   </a:txBody>
-                  <a:tcPr marL="109728" marR="91440" marT="0" marB="0" anchor="ctr">
+                  <a:tcPr marL="109728" marT="0" marB="0" anchor="ctr">
                     <a:lnL w="9525" cap="flat" cmpd="sng" algn="ctr">
                       <a:solidFill>
                         <a:srgbClr val="E2E4EC"/>
@@ -7737,11 +7209,11 @@
                     <a:bodyPr/>
                     <a:lstStyle/>
                     <a:p>
-                      <a:pPr indent="0" marL="0">
+                      <a:pPr marL="0" indent="0">
                         <a:buNone/>
                       </a:pPr>
                       <a:r>
-                        <a:rPr lang="en-US" sz="950" b="1" spc="100" kern="0" dirty="0">
+                        <a:rPr lang="en-US" sz="950" b="1" kern="0" spc="100" dirty="0">
                           <a:solidFill>
                             <a:srgbClr val="878D9C"/>
                           </a:solidFill>
@@ -7758,7 +7230,7 @@
                       </a:endParaRPr>
                     </a:p>
                   </a:txBody>
-                  <a:tcPr marL="109728" marR="91440" marT="0" marB="0" anchor="ctr">
+                  <a:tcPr marL="109728" marT="0" marB="0" anchor="ctr">
                     <a:lnL w="9525" cap="flat" cmpd="sng" algn="ctr">
                       <a:solidFill>
                         <a:srgbClr val="E2E4EC"/>
@@ -7800,6 +7272,11 @@
                     </a:solidFill>
                   </a:tcPr>
                 </a:tc>
+                <a:extLst>
+                  <a:ext uri="{0D108BD9-81ED-4DB2-BD59-A6C34878D82A}">
+                    <a16:rowId xmlns:a16="http://schemas.microsoft.com/office/drawing/2014/main" val="10000"/>
+                  </a:ext>
+                </a:extLst>
               </a:tr>
               <a:tr h="347472">
                 <a:tc>
@@ -7807,7 +7284,7 @@
                     <a:bodyPr/>
                     <a:lstStyle/>
                     <a:p>
-                      <a:pPr indent="0" marL="0">
+                      <a:pPr marL="0" indent="0">
                         <a:buNone/>
                       </a:pPr>
                       <a:r>
@@ -7828,7 +7305,7 @@
                       </a:endParaRPr>
                     </a:p>
                   </a:txBody>
-                  <a:tcPr marL="109728" marR="91440" marT="0" marB="0" anchor="ctr">
+                  <a:tcPr marL="109728" marT="0" marB="0" anchor="ctr">
                     <a:lnL w="9525" cap="flat" cmpd="sng" algn="ctr">
                       <a:solidFill>
                         <a:srgbClr val="E2E4EC"/>
@@ -7875,7 +7352,7 @@
                     <a:bodyPr/>
                     <a:lstStyle/>
                     <a:p>
-                      <a:pPr indent="0" marL="0">
+                      <a:pPr marL="0" indent="0">
                         <a:buNone/>
                       </a:pPr>
                       <a:r>
@@ -7896,7 +7373,7 @@
                       </a:endParaRPr>
                     </a:p>
                   </a:txBody>
-                  <a:tcPr marL="109728" marR="91440" marT="0" marB="0" anchor="ctr">
+                  <a:tcPr marL="109728" marT="0" marB="0" anchor="ctr">
                     <a:lnL w="9525" cap="flat" cmpd="sng" algn="ctr">
                       <a:solidFill>
                         <a:srgbClr val="E2E4EC"/>
@@ -7943,7 +7420,7 @@
                     <a:bodyPr/>
                     <a:lstStyle/>
                     <a:p>
-                      <a:pPr indent="0" marL="0">
+                      <a:pPr marL="0" indent="0">
                         <a:buNone/>
                       </a:pPr>
                       <a:r>
@@ -7964,7 +7441,7 @@
                       </a:endParaRPr>
                     </a:p>
                   </a:txBody>
-                  <a:tcPr marL="109728" marR="91440" marT="0" marB="0" anchor="ctr">
+                  <a:tcPr marL="109728" marT="0" marB="0" anchor="ctr">
                     <a:lnL w="9525" cap="flat" cmpd="sng" algn="ctr">
                       <a:solidFill>
                         <a:srgbClr val="E2E4EC"/>
@@ -8006,6 +7483,11 @@
                     </a:solidFill>
                   </a:tcPr>
                 </a:tc>
+                <a:extLst>
+                  <a:ext uri="{0D108BD9-81ED-4DB2-BD59-A6C34878D82A}">
+                    <a16:rowId xmlns:a16="http://schemas.microsoft.com/office/drawing/2014/main" val="10001"/>
+                  </a:ext>
+                </a:extLst>
               </a:tr>
               <a:tr h="347472">
                 <a:tc>
@@ -8013,7 +7495,7 @@
                     <a:bodyPr/>
                     <a:lstStyle/>
                     <a:p>
-                      <a:pPr indent="0" marL="0">
+                      <a:pPr marL="0" indent="0">
                         <a:buNone/>
                       </a:pPr>
                       <a:r>
@@ -8034,7 +7516,7 @@
                       </a:endParaRPr>
                     </a:p>
                   </a:txBody>
-                  <a:tcPr marL="109728" marR="91440" marT="0" marB="0" anchor="ctr">
+                  <a:tcPr marL="109728" marT="0" marB="0" anchor="ctr">
                     <a:lnL w="9525" cap="flat" cmpd="sng" algn="ctr">
                       <a:solidFill>
                         <a:srgbClr val="E2E4EC"/>
@@ -8081,7 +7563,7 @@
                     <a:bodyPr/>
                     <a:lstStyle/>
                     <a:p>
-                      <a:pPr indent="0" marL="0">
+                      <a:pPr marL="0" indent="0">
                         <a:buNone/>
                       </a:pPr>
                       <a:r>
@@ -8102,7 +7584,7 @@
                       </a:endParaRPr>
                     </a:p>
                   </a:txBody>
-                  <a:tcPr marL="109728" marR="91440" marT="0" marB="0" anchor="ctr">
+                  <a:tcPr marL="109728" marT="0" marB="0" anchor="ctr">
                     <a:lnL w="9525" cap="flat" cmpd="sng" algn="ctr">
                       <a:solidFill>
                         <a:srgbClr val="E2E4EC"/>
@@ -8149,7 +7631,7 @@
                     <a:bodyPr/>
                     <a:lstStyle/>
                     <a:p>
-                      <a:pPr indent="0" marL="0">
+                      <a:pPr marL="0" indent="0">
                         <a:buNone/>
                       </a:pPr>
                       <a:r>
@@ -8170,7 +7652,7 @@
                       </a:endParaRPr>
                     </a:p>
                   </a:txBody>
-                  <a:tcPr marL="109728" marR="91440" marT="0" marB="0" anchor="ctr">
+                  <a:tcPr marL="109728" marT="0" marB="0" anchor="ctr">
                     <a:lnL w="9525" cap="flat" cmpd="sng" algn="ctr">
                       <a:solidFill>
                         <a:srgbClr val="E2E4EC"/>
@@ -8212,6 +7694,11 @@
                     </a:solidFill>
                   </a:tcPr>
                 </a:tc>
+                <a:extLst>
+                  <a:ext uri="{0D108BD9-81ED-4DB2-BD59-A6C34878D82A}">
+                    <a16:rowId xmlns:a16="http://schemas.microsoft.com/office/drawing/2014/main" val="10002"/>
+                  </a:ext>
+                </a:extLst>
               </a:tr>
               <a:tr h="347472">
                 <a:tc>
@@ -8219,7 +7706,7 @@
                     <a:bodyPr/>
                     <a:lstStyle/>
                     <a:p>
-                      <a:pPr indent="0" marL="0">
+                      <a:pPr marL="0" indent="0">
                         <a:buNone/>
                       </a:pPr>
                       <a:r>
@@ -8240,7 +7727,7 @@
                       </a:endParaRPr>
                     </a:p>
                   </a:txBody>
-                  <a:tcPr marL="109728" marR="91440" marT="0" marB="0" anchor="ctr">
+                  <a:tcPr marL="109728" marT="0" marB="0" anchor="ctr">
                     <a:lnL w="9525" cap="flat" cmpd="sng" algn="ctr">
                       <a:solidFill>
                         <a:srgbClr val="E2E4EC"/>
@@ -8287,7 +7774,7 @@
                     <a:bodyPr/>
                     <a:lstStyle/>
                     <a:p>
-                      <a:pPr indent="0" marL="0">
+                      <a:pPr marL="0" indent="0">
                         <a:buNone/>
                       </a:pPr>
                       <a:r>
@@ -8308,7 +7795,7 @@
                       </a:endParaRPr>
                     </a:p>
                   </a:txBody>
-                  <a:tcPr marL="109728" marR="91440" marT="0" marB="0" anchor="ctr">
+                  <a:tcPr marL="109728" marT="0" marB="0" anchor="ctr">
                     <a:lnL w="9525" cap="flat" cmpd="sng" algn="ctr">
                       <a:solidFill>
                         <a:srgbClr val="E2E4EC"/>
@@ -8355,7 +7842,7 @@
                     <a:bodyPr/>
                     <a:lstStyle/>
                     <a:p>
-                      <a:pPr indent="0" marL="0">
+                      <a:pPr marL="0" indent="0">
                         <a:buNone/>
                       </a:pPr>
                       <a:r>
@@ -8376,7 +7863,7 @@
                       </a:endParaRPr>
                     </a:p>
                   </a:txBody>
-                  <a:tcPr marL="109728" marR="91440" marT="0" marB="0" anchor="ctr">
+                  <a:tcPr marL="109728" marT="0" marB="0" anchor="ctr">
                     <a:lnL w="9525" cap="flat" cmpd="sng" algn="ctr">
                       <a:solidFill>
                         <a:srgbClr val="E2E4EC"/>
@@ -8418,6 +7905,11 @@
                     </a:solidFill>
                   </a:tcPr>
                 </a:tc>
+                <a:extLst>
+                  <a:ext uri="{0D108BD9-81ED-4DB2-BD59-A6C34878D82A}">
+                    <a16:rowId xmlns:a16="http://schemas.microsoft.com/office/drawing/2014/main" val="10003"/>
+                  </a:ext>
+                </a:extLst>
               </a:tr>
               <a:tr h="347472">
                 <a:tc>
@@ -8425,7 +7917,7 @@
                     <a:bodyPr/>
                     <a:lstStyle/>
                     <a:p>
-                      <a:pPr indent="0" marL="0">
+                      <a:pPr marL="0" indent="0">
                         <a:buNone/>
                       </a:pPr>
                       <a:r>
@@ -8446,7 +7938,7 @@
                       </a:endParaRPr>
                     </a:p>
                   </a:txBody>
-                  <a:tcPr marL="109728" marR="91440" marT="0" marB="0" anchor="ctr">
+                  <a:tcPr marL="109728" marT="0" marB="0" anchor="ctr">
                     <a:lnL w="9525" cap="flat" cmpd="sng" algn="ctr">
                       <a:solidFill>
                         <a:srgbClr val="E2E4EC"/>
@@ -8493,7 +7985,7 @@
                     <a:bodyPr/>
                     <a:lstStyle/>
                     <a:p>
-                      <a:pPr indent="0" marL="0">
+                      <a:pPr marL="0" indent="0">
                         <a:buNone/>
                       </a:pPr>
                       <a:r>
@@ -8514,7 +8006,7 @@
                       </a:endParaRPr>
                     </a:p>
                   </a:txBody>
-                  <a:tcPr marL="109728" marR="91440" marT="0" marB="0" anchor="ctr">
+                  <a:tcPr marL="109728" marT="0" marB="0" anchor="ctr">
                     <a:lnL w="9525" cap="flat" cmpd="sng" algn="ctr">
                       <a:solidFill>
                         <a:srgbClr val="E2E4EC"/>
@@ -8561,7 +8053,7 @@
                     <a:bodyPr/>
                     <a:lstStyle/>
                     <a:p>
-                      <a:pPr indent="0" marL="0">
+                      <a:pPr marL="0" indent="0">
                         <a:buNone/>
                       </a:pPr>
                       <a:r>
@@ -8582,7 +8074,7 @@
                       </a:endParaRPr>
                     </a:p>
                   </a:txBody>
-                  <a:tcPr marL="109728" marR="91440" marT="0" marB="0" anchor="ctr">
+                  <a:tcPr marL="109728" marT="0" marB="0" anchor="ctr">
                     <a:lnL w="9525" cap="flat" cmpd="sng" algn="ctr">
                       <a:solidFill>
                         <a:srgbClr val="E2E4EC"/>
@@ -8624,6 +8116,11 @@
                     </a:solidFill>
                   </a:tcPr>
                 </a:tc>
+                <a:extLst>
+                  <a:ext uri="{0D108BD9-81ED-4DB2-BD59-A6C34878D82A}">
+                    <a16:rowId xmlns:a16="http://schemas.microsoft.com/office/drawing/2014/main" val="10004"/>
+                  </a:ext>
+                </a:extLst>
               </a:tr>
               <a:tr h="347472">
                 <a:tc>
@@ -8631,7 +8128,7 @@
                     <a:bodyPr/>
                     <a:lstStyle/>
                     <a:p>
-                      <a:pPr indent="0" marL="0">
+                      <a:pPr marL="0" indent="0">
                         <a:buNone/>
                       </a:pPr>
                       <a:r>
@@ -8652,7 +8149,7 @@
                       </a:endParaRPr>
                     </a:p>
                   </a:txBody>
-                  <a:tcPr marL="109728" marR="91440" marT="0" marB="0" anchor="ctr">
+                  <a:tcPr marL="109728" marT="0" marB="0" anchor="ctr">
                     <a:lnL w="9525" cap="flat" cmpd="sng" algn="ctr">
                       <a:solidFill>
                         <a:srgbClr val="E2E4EC"/>
@@ -8699,7 +8196,7 @@
                     <a:bodyPr/>
                     <a:lstStyle/>
                     <a:p>
-                      <a:pPr indent="0" marL="0">
+                      <a:pPr marL="0" indent="0">
                         <a:buNone/>
                       </a:pPr>
                       <a:r>
@@ -8720,7 +8217,7 @@
                       </a:endParaRPr>
                     </a:p>
                   </a:txBody>
-                  <a:tcPr marL="109728" marR="91440" marT="0" marB="0" anchor="ctr">
+                  <a:tcPr marL="109728" marT="0" marB="0" anchor="ctr">
                     <a:lnL w="9525" cap="flat" cmpd="sng" algn="ctr">
                       <a:solidFill>
                         <a:srgbClr val="E2E4EC"/>
@@ -8767,7 +8264,7 @@
                     <a:bodyPr/>
                     <a:lstStyle/>
                     <a:p>
-                      <a:pPr indent="0" marL="0">
+                      <a:pPr marL="0" indent="0">
                         <a:buNone/>
                       </a:pPr>
                       <a:r>
@@ -8788,7 +8285,7 @@
                       </a:endParaRPr>
                     </a:p>
                   </a:txBody>
-                  <a:tcPr marL="109728" marR="91440" marT="0" marB="0" anchor="ctr">
+                  <a:tcPr marL="109728" marT="0" marB="0" anchor="ctr">
                     <a:lnL w="9525" cap="flat" cmpd="sng" algn="ctr">
                       <a:solidFill>
                         <a:srgbClr val="E2E4EC"/>
@@ -8830,6 +8327,11 @@
                     </a:solidFill>
                   </a:tcPr>
                 </a:tc>
+                <a:extLst>
+                  <a:ext uri="{0D108BD9-81ED-4DB2-BD59-A6C34878D82A}">
+                    <a16:rowId xmlns:a16="http://schemas.microsoft.com/office/drawing/2014/main" val="10005"/>
+                  </a:ext>
+                </a:extLst>
               </a:tr>
               <a:tr h="347472">
                 <a:tc>
@@ -8837,7 +8339,7 @@
                     <a:bodyPr/>
                     <a:lstStyle/>
                     <a:p>
-                      <a:pPr indent="0" marL="0">
+                      <a:pPr marL="0" indent="0">
                         <a:buNone/>
                       </a:pPr>
                       <a:r>
@@ -8858,7 +8360,7 @@
                       </a:endParaRPr>
                     </a:p>
                   </a:txBody>
-                  <a:tcPr marL="109728" marR="91440" marT="0" marB="0" anchor="ctr">
+                  <a:tcPr marL="109728" marT="0" marB="0" anchor="ctr">
                     <a:lnL w="9525" cap="flat" cmpd="sng" algn="ctr">
                       <a:solidFill>
                         <a:srgbClr val="E2E4EC"/>
@@ -8905,7 +8407,7 @@
                     <a:bodyPr/>
                     <a:lstStyle/>
                     <a:p>
-                      <a:pPr indent="0" marL="0">
+                      <a:pPr marL="0" indent="0">
                         <a:buNone/>
                       </a:pPr>
                       <a:r>
@@ -8926,7 +8428,7 @@
                       </a:endParaRPr>
                     </a:p>
                   </a:txBody>
-                  <a:tcPr marL="109728" marR="91440" marT="0" marB="0" anchor="ctr">
+                  <a:tcPr marL="109728" marT="0" marB="0" anchor="ctr">
                     <a:lnL w="9525" cap="flat" cmpd="sng" algn="ctr">
                       <a:solidFill>
                         <a:srgbClr val="E2E4EC"/>
@@ -8973,7 +8475,7 @@
                     <a:bodyPr/>
                     <a:lstStyle/>
                     <a:p>
-                      <a:pPr indent="0" marL="0">
+                      <a:pPr marL="0" indent="0">
                         <a:buNone/>
                       </a:pPr>
                       <a:r>
@@ -8994,7 +8496,7 @@
                       </a:endParaRPr>
                     </a:p>
                   </a:txBody>
-                  <a:tcPr marL="109728" marR="91440" marT="0" marB="0" anchor="ctr">
+                  <a:tcPr marL="109728" marT="0" marB="0" anchor="ctr">
                     <a:lnL w="9525" cap="flat" cmpd="sng" algn="ctr">
                       <a:solidFill>
                         <a:srgbClr val="E2E4EC"/>
@@ -9036,6 +8538,11 @@
                     </a:solidFill>
                   </a:tcPr>
                 </a:tc>
+                <a:extLst>
+                  <a:ext uri="{0D108BD9-81ED-4DB2-BD59-A6C34878D82A}">
+                    <a16:rowId xmlns:a16="http://schemas.microsoft.com/office/drawing/2014/main" val="10006"/>
+                  </a:ext>
+                </a:extLst>
               </a:tr>
               <a:tr h="347472">
                 <a:tc>
@@ -9043,7 +8550,7 @@
                     <a:bodyPr/>
                     <a:lstStyle/>
                     <a:p>
-                      <a:pPr indent="0" marL="0">
+                      <a:pPr marL="0" indent="0">
                         <a:buNone/>
                       </a:pPr>
                       <a:r>
@@ -9064,7 +8571,7 @@
                       </a:endParaRPr>
                     </a:p>
                   </a:txBody>
-                  <a:tcPr marL="109728" marR="91440" marT="0" marB="0" anchor="ctr">
+                  <a:tcPr marL="109728" marT="0" marB="0" anchor="ctr">
                     <a:lnL w="9525" cap="flat" cmpd="sng" algn="ctr">
                       <a:solidFill>
                         <a:srgbClr val="E2E4EC"/>
@@ -9111,7 +8618,7 @@
                     <a:bodyPr/>
                     <a:lstStyle/>
                     <a:p>
-                      <a:pPr indent="0" marL="0">
+                      <a:pPr marL="0" indent="0">
                         <a:buNone/>
                       </a:pPr>
                       <a:r>
@@ -9132,7 +8639,7 @@
                       </a:endParaRPr>
                     </a:p>
                   </a:txBody>
-                  <a:tcPr marL="109728" marR="91440" marT="0" marB="0" anchor="ctr">
+                  <a:tcPr marL="109728" marT="0" marB="0" anchor="ctr">
                     <a:lnL w="9525" cap="flat" cmpd="sng" algn="ctr">
                       <a:solidFill>
                         <a:srgbClr val="E2E4EC"/>
@@ -9179,7 +8686,7 @@
                     <a:bodyPr/>
                     <a:lstStyle/>
                     <a:p>
-                      <a:pPr indent="0" marL="0">
+                      <a:pPr marL="0" indent="0">
                         <a:buNone/>
                       </a:pPr>
                       <a:r>
@@ -9200,7 +8707,7 @@
                       </a:endParaRPr>
                     </a:p>
                   </a:txBody>
-                  <a:tcPr marL="109728" marR="91440" marT="0" marB="0" anchor="ctr">
+                  <a:tcPr marL="109728" marT="0" marB="0" anchor="ctr">
                     <a:lnL w="9525" cap="flat" cmpd="sng" algn="ctr">
                       <a:solidFill>
                         <a:srgbClr val="E2E4EC"/>
@@ -9242,6 +8749,11 @@
                     </a:solidFill>
                   </a:tcPr>
                 </a:tc>
+                <a:extLst>
+                  <a:ext uri="{0D108BD9-81ED-4DB2-BD59-A6C34878D82A}">
+                    <a16:rowId xmlns:a16="http://schemas.microsoft.com/office/drawing/2014/main" val="10007"/>
+                  </a:ext>
+                </a:extLst>
               </a:tr>
               <a:tr h="347472">
                 <a:tc>
@@ -9249,7 +8761,7 @@
                     <a:bodyPr/>
                     <a:lstStyle/>
                     <a:p>
-                      <a:pPr indent="0" marL="0">
+                      <a:pPr marL="0" indent="0">
                         <a:buNone/>
                       </a:pPr>
                       <a:r>
@@ -9270,7 +8782,7 @@
                       </a:endParaRPr>
                     </a:p>
                   </a:txBody>
-                  <a:tcPr marL="109728" marR="91440" marT="0" marB="0" anchor="ctr">
+                  <a:tcPr marL="109728" marT="0" marB="0" anchor="ctr">
                     <a:lnL w="9525" cap="flat" cmpd="sng" algn="ctr">
                       <a:solidFill>
                         <a:srgbClr val="E2E4EC"/>
@@ -9317,7 +8829,7 @@
                     <a:bodyPr/>
                     <a:lstStyle/>
                     <a:p>
-                      <a:pPr indent="0" marL="0">
+                      <a:pPr marL="0" indent="0">
                         <a:buNone/>
                       </a:pPr>
                       <a:r>
@@ -9338,7 +8850,7 @@
                       </a:endParaRPr>
                     </a:p>
                   </a:txBody>
-                  <a:tcPr marL="109728" marR="91440" marT="0" marB="0" anchor="ctr">
+                  <a:tcPr marL="109728" marT="0" marB="0" anchor="ctr">
                     <a:lnL w="9525" cap="flat" cmpd="sng" algn="ctr">
                       <a:solidFill>
                         <a:srgbClr val="E2E4EC"/>
@@ -9385,7 +8897,7 @@
                     <a:bodyPr/>
                     <a:lstStyle/>
                     <a:p>
-                      <a:pPr indent="0" marL="0">
+                      <a:pPr marL="0" indent="0">
                         <a:buNone/>
                       </a:pPr>
                       <a:r>
@@ -9406,7 +8918,7 @@
                       </a:endParaRPr>
                     </a:p>
                   </a:txBody>
-                  <a:tcPr marL="109728" marR="91440" marT="0" marB="0" anchor="ctr">
+                  <a:tcPr marL="109728" marT="0" marB="0" anchor="ctr">
                     <a:lnL w="9525" cap="flat" cmpd="sng" algn="ctr">
                       <a:solidFill>
                         <a:srgbClr val="E2E4EC"/>
@@ -9448,6 +8960,11 @@
                     </a:solidFill>
                   </a:tcPr>
                 </a:tc>
+                <a:extLst>
+                  <a:ext uri="{0D108BD9-81ED-4DB2-BD59-A6C34878D82A}">
+                    <a16:rowId xmlns:a16="http://schemas.microsoft.com/office/drawing/2014/main" val="10008"/>
+                  </a:ext>
+                </a:extLst>
               </a:tr>
               <a:tr h="347472">
                 <a:tc>
@@ -9455,7 +8972,7 @@
                     <a:bodyPr/>
                     <a:lstStyle/>
                     <a:p>
-                      <a:pPr indent="0" marL="0">
+                      <a:pPr marL="0" indent="0">
                         <a:buNone/>
                       </a:pPr>
                       <a:r>
@@ -9476,7 +8993,7 @@
                       </a:endParaRPr>
                     </a:p>
                   </a:txBody>
-                  <a:tcPr marL="109728" marR="91440" marT="0" marB="0" anchor="ctr">
+                  <a:tcPr marL="109728" marT="0" marB="0" anchor="ctr">
                     <a:lnL w="9525" cap="flat" cmpd="sng" algn="ctr">
                       <a:solidFill>
                         <a:srgbClr val="E2E4EC"/>
@@ -9523,7 +9040,7 @@
                     <a:bodyPr/>
                     <a:lstStyle/>
                     <a:p>
-                      <a:pPr indent="0" marL="0">
+                      <a:pPr marL="0" indent="0">
                         <a:buNone/>
                       </a:pPr>
                       <a:r>
@@ -9544,7 +9061,7 @@
                       </a:endParaRPr>
                     </a:p>
                   </a:txBody>
-                  <a:tcPr marL="109728" marR="91440" marT="0" marB="0" anchor="ctr">
+                  <a:tcPr marL="109728" marT="0" marB="0" anchor="ctr">
                     <a:lnL w="9525" cap="flat" cmpd="sng" algn="ctr">
                       <a:solidFill>
                         <a:srgbClr val="E2E4EC"/>
@@ -9591,7 +9108,7 @@
                     <a:bodyPr/>
                     <a:lstStyle/>
                     <a:p>
-                      <a:pPr indent="0" marL="0">
+                      <a:pPr marL="0" indent="0">
                         <a:buNone/>
                       </a:pPr>
                       <a:r>
@@ -9612,7 +9129,7 @@
                       </a:endParaRPr>
                     </a:p>
                   </a:txBody>
-                  <a:tcPr marL="109728" marR="91440" marT="0" marB="0" anchor="ctr">
+                  <a:tcPr marL="109728" marT="0" marB="0" anchor="ctr">
                     <a:lnL w="9525" cap="flat" cmpd="sng" algn="ctr">
                       <a:solidFill>
                         <a:srgbClr val="E2E4EC"/>
@@ -9654,6 +9171,11 @@
                     </a:solidFill>
                   </a:tcPr>
                 </a:tc>
+                <a:extLst>
+                  <a:ext uri="{0D108BD9-81ED-4DB2-BD59-A6C34878D82A}">
+                    <a16:rowId xmlns:a16="http://schemas.microsoft.com/office/drawing/2014/main" val="10009"/>
+                  </a:ext>
+                </a:extLst>
               </a:tr>
               <a:tr h="347472">
                 <a:tc>
@@ -9661,7 +9183,7 @@
                     <a:bodyPr/>
                     <a:lstStyle/>
                     <a:p>
-                      <a:pPr indent="0" marL="0">
+                      <a:pPr marL="0" indent="0">
                         <a:buNone/>
                       </a:pPr>
                       <a:r>
@@ -9682,7 +9204,7 @@
                       </a:endParaRPr>
                     </a:p>
                   </a:txBody>
-                  <a:tcPr marL="109728" marR="91440" marT="0" marB="0" anchor="ctr">
+                  <a:tcPr marL="109728" marT="0" marB="0" anchor="ctr">
                     <a:lnL w="9525" cap="flat" cmpd="sng" algn="ctr">
                       <a:solidFill>
                         <a:srgbClr val="E2E4EC"/>
@@ -9729,7 +9251,7 @@
                     <a:bodyPr/>
                     <a:lstStyle/>
                     <a:p>
-                      <a:pPr indent="0" marL="0">
+                      <a:pPr marL="0" indent="0">
                         <a:buNone/>
                       </a:pPr>
                       <a:r>
@@ -9750,7 +9272,7 @@
                       </a:endParaRPr>
                     </a:p>
                   </a:txBody>
-                  <a:tcPr marL="109728" marR="91440" marT="0" marB="0" anchor="ctr">
+                  <a:tcPr marL="109728" marT="0" marB="0" anchor="ctr">
                     <a:lnL w="9525" cap="flat" cmpd="sng" algn="ctr">
                       <a:solidFill>
                         <a:srgbClr val="E2E4EC"/>
@@ -9797,7 +9319,7 @@
                     <a:bodyPr/>
                     <a:lstStyle/>
                     <a:p>
-                      <a:pPr indent="0" marL="0">
+                      <a:pPr marL="0" indent="0">
                         <a:buNone/>
                       </a:pPr>
                       <a:r>
@@ -9818,7 +9340,7 @@
                       </a:endParaRPr>
                     </a:p>
                   </a:txBody>
-                  <a:tcPr marL="109728" marR="91440" marT="0" marB="0" anchor="ctr">
+                  <a:tcPr marL="109728" marT="0" marB="0" anchor="ctr">
                     <a:lnL w="9525" cap="flat" cmpd="sng" algn="ctr">
                       <a:solidFill>
                         <a:srgbClr val="E2E4EC"/>
@@ -9860,6 +9382,11 @@
                     </a:solidFill>
                   </a:tcPr>
                 </a:tc>
+                <a:extLst>
+                  <a:ext uri="{0D108BD9-81ED-4DB2-BD59-A6C34878D82A}">
+                    <a16:rowId xmlns:a16="http://schemas.microsoft.com/office/drawing/2014/main" val="10010"/>
+                  </a:ext>
+                </a:extLst>
               </a:tr>
               <a:tr h="347472">
                 <a:tc>
@@ -9867,7 +9394,7 @@
                     <a:bodyPr/>
                     <a:lstStyle/>
                     <a:p>
-                      <a:pPr indent="0" marL="0">
+                      <a:pPr marL="0" indent="0">
                         <a:buNone/>
                       </a:pPr>
                       <a:r>
@@ -9888,7 +9415,7 @@
                       </a:endParaRPr>
                     </a:p>
                   </a:txBody>
-                  <a:tcPr marL="109728" marR="91440" marT="0" marB="0" anchor="ctr">
+                  <a:tcPr marL="109728" marT="0" marB="0" anchor="ctr">
                     <a:lnL w="9525" cap="flat" cmpd="sng" algn="ctr">
                       <a:solidFill>
                         <a:srgbClr val="E2E4EC"/>
@@ -9935,7 +9462,7 @@
                     <a:bodyPr/>
                     <a:lstStyle/>
                     <a:p>
-                      <a:pPr indent="0" marL="0">
+                      <a:pPr marL="0" indent="0">
                         <a:buNone/>
                       </a:pPr>
                       <a:r>
@@ -9956,7 +9483,7 @@
                       </a:endParaRPr>
                     </a:p>
                   </a:txBody>
-                  <a:tcPr marL="109728" marR="91440" marT="0" marB="0" anchor="ctr">
+                  <a:tcPr marL="109728" marT="0" marB="0" anchor="ctr">
                     <a:lnL w="9525" cap="flat" cmpd="sng" algn="ctr">
                       <a:solidFill>
                         <a:srgbClr val="E2E4EC"/>
@@ -10003,7 +9530,7 @@
                     <a:bodyPr/>
                     <a:lstStyle/>
                     <a:p>
-                      <a:pPr indent="0" marL="0">
+                      <a:pPr marL="0" indent="0">
                         <a:buNone/>
                       </a:pPr>
                       <a:r>
@@ -10024,7 +9551,7 @@
                       </a:endParaRPr>
                     </a:p>
                   </a:txBody>
-                  <a:tcPr marL="109728" marR="91440" marT="0" marB="0" anchor="ctr">
+                  <a:tcPr marL="109728" marT="0" marB="0" anchor="ctr">
                     <a:lnL w="9525" cap="flat" cmpd="sng" algn="ctr">
                       <a:solidFill>
                         <a:srgbClr val="E2E4EC"/>
@@ -10066,6 +9593,11 @@
                     </a:solidFill>
                   </a:tcPr>
                 </a:tc>
+                <a:extLst>
+                  <a:ext uri="{0D108BD9-81ED-4DB2-BD59-A6C34878D82A}">
+                    <a16:rowId xmlns:a16="http://schemas.microsoft.com/office/drawing/2014/main" val="10011"/>
+                  </a:ext>
+                </a:extLst>
               </a:tr>
               <a:tr h="347472">
                 <a:tc>
@@ -10073,7 +9605,7 @@
                     <a:bodyPr/>
                     <a:lstStyle/>
                     <a:p>
-                      <a:pPr indent="0" marL="0">
+                      <a:pPr marL="0" indent="0">
                         <a:buNone/>
                       </a:pPr>
                       <a:r>
@@ -10094,7 +9626,7 @@
                       </a:endParaRPr>
                     </a:p>
                   </a:txBody>
-                  <a:tcPr marL="109728" marR="91440" marT="0" marB="0" anchor="ctr">
+                  <a:tcPr marL="109728" marT="0" marB="0" anchor="ctr">
                     <a:lnL w="9525" cap="flat" cmpd="sng" algn="ctr">
                       <a:solidFill>
                         <a:srgbClr val="E2E4EC"/>
@@ -10141,7 +9673,7 @@
                     <a:bodyPr/>
                     <a:lstStyle/>
                     <a:p>
-                      <a:pPr indent="0" marL="0">
+                      <a:pPr marL="0" indent="0">
                         <a:buNone/>
                       </a:pPr>
                       <a:r>
@@ -10162,7 +9694,7 @@
                       </a:endParaRPr>
                     </a:p>
                   </a:txBody>
-                  <a:tcPr marL="109728" marR="91440" marT="0" marB="0" anchor="ctr">
+                  <a:tcPr marL="109728" marT="0" marB="0" anchor="ctr">
                     <a:lnL w="9525" cap="flat" cmpd="sng" algn="ctr">
                       <a:solidFill>
                         <a:srgbClr val="E2E4EC"/>
@@ -10209,7 +9741,7 @@
                     <a:bodyPr/>
                     <a:lstStyle/>
                     <a:p>
-                      <a:pPr indent="0" marL="0">
+                      <a:pPr marL="0" indent="0">
                         <a:buNone/>
                       </a:pPr>
                       <a:r>
@@ -10230,7 +9762,7 @@
                       </a:endParaRPr>
                     </a:p>
                   </a:txBody>
-                  <a:tcPr marL="109728" marR="91440" marT="0" marB="0" anchor="ctr">
+                  <a:tcPr marL="109728" marT="0" marB="0" anchor="ctr">
                     <a:lnL w="9525" cap="flat" cmpd="sng" algn="ctr">
                       <a:solidFill>
                         <a:srgbClr val="E2E4EC"/>
@@ -10272,6 +9804,11 @@
                     </a:solidFill>
                   </a:tcPr>
                 </a:tc>
+                <a:extLst>
+                  <a:ext uri="{0D108BD9-81ED-4DB2-BD59-A6C34878D82A}">
+                    <a16:rowId xmlns:a16="http://schemas.microsoft.com/office/drawing/2014/main" val="10012"/>
+                  </a:ext>
+                </a:extLst>
               </a:tr>
             </a:tbl>
           </a:graphicData>
@@ -10298,7 +9835,7 @@
           <a:bodyPr wrap="square" lIns="0" tIns="0" rIns="0" bIns="0" rtlCol="0" anchor="ctr"/>
           <a:lstStyle/>
           <a:p>
-            <a:pPr indent="0" marL="0">
+            <a:pPr marL="0" indent="0">
               <a:buNone/>
             </a:pPr>
             <a:r>
@@ -10312,9 +9849,6 @@
               </a:rPr>
               <a:t>Raw output committed under </a:t>
             </a:r>
-            <a:pPr indent="0" marL="0">
-              <a:buNone/>
-            </a:pPr>
             <a:r>
               <a:rPr lang="en-US" sz="1000" dirty="0">
                 <a:solidFill>
@@ -10326,9 +9860,6 @@
               </a:rPr>
               <a:t>docs/devops/evidence/</a:t>
             </a:r>
-            <a:pPr indent="0" marL="0">
-              <a:buNone/>
-            </a:pPr>
             <a:r>
               <a:rPr lang="en-US" sz="1000" dirty="0">
                 <a:solidFill>
@@ -10360,6 +9891,7 @@
         <a:solidFill>
           <a:srgbClr val="FBFBFD"/>
         </a:solidFill>
+        <a:effectLst/>
       </p:bgPr>
     </p:bg>
     <p:spTree>
@@ -10378,14 +9910,14 @@
       </p:grpSpPr>
       <p:pic>
         <p:nvPicPr>
-          <p:cNvPr id="2" name="Image 0" descr="/tmp/claude-0/-home-user-ForgeFlow/c54c4f28-0214-5817-a71a-61a1132558a0/scratchpad/img/mark.png">    </p:cNvPr>
+          <p:cNvPr id="2" name="Image 0" descr="/tmp/claude-0/-home-user-ForgeFlow/c54c4f28-0214-5817-a71a-61a1132558a0/scratchpad/img/mark.png"/>
           <p:cNvPicPr>
             <a:picLocks noChangeAspect="1"/>
           </p:cNvPicPr>
           <p:nvPr/>
         </p:nvPicPr>
         <p:blipFill>
-          <a:blip r:embed="rId1"/>
+          <a:blip r:embed="rId3"/>
           <a:stretch>
             <a:fillRect/>
           </a:stretch>
@@ -10421,7 +9953,7 @@
           <a:bodyPr wrap="square" lIns="0" tIns="0" rIns="0" bIns="0" rtlCol="0" anchor="ctr"/>
           <a:lstStyle/>
           <a:p>
-            <a:pPr indent="0" marL="0">
+            <a:pPr marL="0" indent="0">
               <a:buNone/>
             </a:pPr>
             <a:r>
@@ -10435,9 +9967,6 @@
               </a:rPr>
               <a:t>ForgeFlow</a:t>
             </a:r>
-            <a:pPr indent="0" marL="0">
-              <a:buNone/>
-            </a:pPr>
             <a:r>
               <a:rPr lang="en-US" sz="1100" dirty="0">
                 <a:solidFill>
@@ -10474,7 +10003,7 @@
           <a:bodyPr wrap="square" lIns="0" tIns="0" rIns="0" bIns="0" rtlCol="0" anchor="ctr"/>
           <a:lstStyle/>
           <a:p>
-            <a:pPr algn="r" indent="0" marL="0">
+            <a:pPr marL="0" indent="0" algn="r">
               <a:buNone/>
             </a:pPr>
             <a:r>
@@ -10513,11 +10042,11 @@
           <a:bodyPr wrap="square" lIns="0" tIns="0" rIns="0" bIns="0" rtlCol="0" anchor="ctr"/>
           <a:lstStyle/>
           <a:p>
-            <a:pPr indent="0" marL="0">
-              <a:buNone/>
-            </a:pPr>
-            <a:r>
-              <a:rPr lang="en-US" sz="1050" b="1" spc="300" kern="0" dirty="0">
+            <a:pPr marL="0" indent="0">
+              <a:buNone/>
+            </a:pPr>
+            <a:r>
+              <a:rPr lang="en-US" sz="1050" b="1" kern="0" spc="300" dirty="0">
                 <a:solidFill>
                   <a:srgbClr val="5457E0"/>
                 </a:solidFill>
@@ -10552,7 +10081,7 @@
           <a:bodyPr wrap="square" lIns="0" tIns="0" rIns="0" bIns="0" rtlCol="0" anchor="ctr"/>
           <a:lstStyle/>
           <a:p>
-            <a:pPr indent="0" marL="0">
+            <a:pPr marL="0" indent="0">
               <a:buNone/>
             </a:pPr>
             <a:r>
@@ -10566,9 +10095,6 @@
               </a:rPr>
               <a:t>IBM Bob 2.0 Hackathon,</a:t>
             </a:r>
-            <a:pPr indent="0" marL="0">
-              <a:buNone/>
-            </a:pPr>
             <a:r>
               <a:rPr lang="en-US" sz="3000" b="1" dirty="0">
                 <a:solidFill>
@@ -10610,7 +10136,7 @@
             <a:prstDash val="solid"/>
           </a:ln>
           <a:effectLst>
-            <a:outerShdw sx="100000" sy="100000" kx="0" ky="0" algn="bl" rotWithShape="0" blurRad="101600" dist="25400" dir="5400000">
+            <a:outerShdw blurRad="101600" dist="25400" dir="5400000" algn="bl" rotWithShape="0">
               <a:srgbClr val="14161C">
                 <a:alpha val="8000"/>
               </a:srgbClr>
@@ -10639,11 +10165,11 @@
           <a:bodyPr wrap="square" lIns="0" tIns="0" rIns="0" bIns="0" rtlCol="0" anchor="ctr"/>
           <a:lstStyle/>
           <a:p>
-            <a:pPr indent="0" marL="0">
-              <a:buNone/>
-            </a:pPr>
-            <a:r>
-              <a:rPr lang="en-US" sz="1050" b="1" spc="200" kern="0" dirty="0">
+            <a:pPr marL="0" indent="0">
+              <a:buNone/>
+            </a:pPr>
+            <a:r>
+              <a:rPr lang="en-US" sz="1050" b="1" kern="0" spc="200" dirty="0">
                 <a:solidFill>
                   <a:srgbClr val="5457E0"/>
                 </a:solidFill>
@@ -10678,11 +10204,11 @@
           <a:bodyPr wrap="square" lIns="0" tIns="0" rIns="0" bIns="0" rtlCol="0" anchor="ctr"/>
           <a:lstStyle/>
           <a:p>
-            <a:pPr indent="0" marL="0">
-              <a:buNone/>
-            </a:pPr>
-            <a:r>
-              <a:rPr lang="en-US" sz="900" b="1" spc="100" kern="0" dirty="0">
+            <a:pPr marL="0" indent="0">
+              <a:buNone/>
+            </a:pPr>
+            <a:r>
+              <a:rPr lang="en-US" sz="900" b="1" kern="0" spc="100" dirty="0">
                 <a:solidFill>
                   <a:srgbClr val="878D9C"/>
                 </a:solidFill>
@@ -10717,7 +10243,7 @@
           <a:bodyPr wrap="square" lIns="0" tIns="0" rIns="0" bIns="0" rtlCol="0" anchor="t"/>
           <a:lstStyle/>
           <a:p>
-            <a:pPr indent="0" marL="0">
+            <a:pPr marL="0" indent="0">
               <a:buNone/>
             </a:pPr>
             <a:r>
@@ -10756,11 +10282,11 @@
           <a:bodyPr wrap="square" lIns="0" tIns="0" rIns="0" bIns="0" rtlCol="0" anchor="ctr"/>
           <a:lstStyle/>
           <a:p>
-            <a:pPr indent="0" marL="0">
-              <a:buNone/>
-            </a:pPr>
-            <a:r>
-              <a:rPr lang="en-US" sz="900" b="1" spc="100" kern="0" dirty="0">
+            <a:pPr marL="0" indent="0">
+              <a:buNone/>
+            </a:pPr>
+            <a:r>
+              <a:rPr lang="en-US" sz="900" b="1" kern="0" spc="100" dirty="0">
                 <a:solidFill>
                   <a:srgbClr val="878D9C"/>
                 </a:solidFill>
@@ -10795,7 +10321,7 @@
           <a:bodyPr wrap="square" lIns="0" tIns="0" rIns="0" bIns="0" rtlCol="0" anchor="t"/>
           <a:lstStyle/>
           <a:p>
-            <a:pPr indent="0" marL="0">
+            <a:pPr marL="0" indent="0">
               <a:buNone/>
             </a:pPr>
             <a:r>
@@ -10834,11 +10360,11 @@
           <a:bodyPr wrap="square" lIns="0" tIns="0" rIns="0" bIns="0" rtlCol="0" anchor="ctr"/>
           <a:lstStyle/>
           <a:p>
-            <a:pPr indent="0" marL="0">
-              <a:buNone/>
-            </a:pPr>
-            <a:r>
-              <a:rPr lang="en-US" sz="900" b="1" spc="100" kern="0" dirty="0">
+            <a:pPr marL="0" indent="0">
+              <a:buNone/>
+            </a:pPr>
+            <a:r>
+              <a:rPr lang="en-US" sz="900" b="1" kern="0" spc="100" dirty="0">
                 <a:solidFill>
                   <a:srgbClr val="878D9C"/>
                 </a:solidFill>
@@ -10873,7 +10399,7 @@
           <a:bodyPr wrap="square" lIns="0" tIns="0" rIns="0" bIns="0" rtlCol="0" anchor="t"/>
           <a:lstStyle/>
           <a:p>
-            <a:pPr indent="0" marL="0">
+            <a:pPr marL="0" indent="0">
               <a:buNone/>
             </a:pPr>
             <a:r>
@@ -10912,11 +10438,11 @@
           <a:bodyPr wrap="square" lIns="0" tIns="0" rIns="0" bIns="0" rtlCol="0" anchor="ctr"/>
           <a:lstStyle/>
           <a:p>
-            <a:pPr indent="0" marL="0">
-              <a:buNone/>
-            </a:pPr>
-            <a:r>
-              <a:rPr lang="en-US" sz="900" b="1" spc="100" kern="0" dirty="0">
+            <a:pPr marL="0" indent="0">
+              <a:buNone/>
+            </a:pPr>
+            <a:r>
+              <a:rPr lang="en-US" sz="900" b="1" kern="0" spc="100" dirty="0">
                 <a:solidFill>
                   <a:srgbClr val="878D9C"/>
                 </a:solidFill>
@@ -10951,7 +10477,7 @@
           <a:bodyPr wrap="square" lIns="0" tIns="0" rIns="0" bIns="0" rtlCol="0" anchor="t"/>
           <a:lstStyle/>
           <a:p>
-            <a:pPr indent="0" marL="0">
+            <a:pPr marL="0" indent="0">
               <a:buNone/>
             </a:pPr>
             <a:r>
@@ -10990,11 +10516,11 @@
           <a:bodyPr wrap="square" lIns="0" tIns="0" rIns="0" bIns="0" rtlCol="0" anchor="ctr"/>
           <a:lstStyle/>
           <a:p>
-            <a:pPr indent="0" marL="0">
-              <a:buNone/>
-            </a:pPr>
-            <a:r>
-              <a:rPr lang="en-US" sz="900" b="1" spc="100" kern="0" dirty="0">
+            <a:pPr marL="0" indent="0">
+              <a:buNone/>
+            </a:pPr>
+            <a:r>
+              <a:rPr lang="en-US" sz="900" b="1" kern="0" spc="100" dirty="0">
                 <a:solidFill>
                   <a:srgbClr val="878D9C"/>
                 </a:solidFill>
@@ -11029,7 +10555,7 @@
           <a:bodyPr wrap="square" lIns="0" tIns="0" rIns="0" bIns="0" rtlCol="0" anchor="t"/>
           <a:lstStyle/>
           <a:p>
-            <a:pPr indent="0" marL="0">
+            <a:pPr marL="0" indent="0">
               <a:buNone/>
             </a:pPr>
             <a:r>
@@ -11068,11 +10594,11 @@
           <a:bodyPr wrap="square" lIns="0" tIns="0" rIns="0" bIns="0" rtlCol="0" anchor="ctr"/>
           <a:lstStyle/>
           <a:p>
-            <a:pPr indent="0" marL="0">
-              <a:buNone/>
-            </a:pPr>
-            <a:r>
-              <a:rPr lang="en-US" sz="900" b="1" spc="100" kern="0" dirty="0">
+            <a:pPr marL="0" indent="0">
+              <a:buNone/>
+            </a:pPr>
+            <a:r>
+              <a:rPr lang="en-US" sz="900" b="1" kern="0" spc="100" dirty="0">
                 <a:solidFill>
                   <a:srgbClr val="878D9C"/>
                 </a:solidFill>
@@ -11107,7 +10633,7 @@
           <a:bodyPr wrap="square" lIns="0" tIns="0" rIns="0" bIns="0" rtlCol="0" anchor="t"/>
           <a:lstStyle/>
           <a:p>
-            <a:pPr indent="0" marL="0">
+            <a:pPr marL="0" indent="0">
               <a:buNone/>
             </a:pPr>
             <a:r>
@@ -11146,11 +10672,11 @@
           <a:bodyPr wrap="square" lIns="0" tIns="0" rIns="0" bIns="0" rtlCol="0" anchor="ctr"/>
           <a:lstStyle/>
           <a:p>
-            <a:pPr indent="0" marL="0">
-              <a:buNone/>
-            </a:pPr>
-            <a:r>
-              <a:rPr lang="en-US" sz="1050" b="1" spc="200" kern="0" dirty="0">
+            <a:pPr marL="0" indent="0">
+              <a:buNone/>
+            </a:pPr>
+            <a:r>
+              <a:rPr lang="en-US" sz="1050" b="1" kern="0" spc="200" dirty="0">
                 <a:solidFill>
                   <a:srgbClr val="5457E0"/>
                 </a:solidFill>
@@ -11190,7 +10716,7 @@
             <a:prstDash val="solid"/>
           </a:ln>
           <a:effectLst>
-            <a:outerShdw sx="100000" sy="100000" kx="0" ky="0" algn="bl" rotWithShape="0" blurRad="101600" dist="25400" dir="5400000">
+            <a:outerShdw blurRad="101600" dist="25400" dir="5400000" algn="bl" rotWithShape="0">
               <a:srgbClr val="14161C">
                 <a:alpha val="8000"/>
               </a:srgbClr>
@@ -11244,7 +10770,7 @@
           <a:bodyPr wrap="square" lIns="0" tIns="0" rIns="0" bIns="0" rtlCol="0" anchor="ctr"/>
           <a:lstStyle/>
           <a:p>
-            <a:pPr algn="ctr" indent="0" marL="0">
+            <a:pPr marL="0" indent="0" algn="ctr">
               <a:buNone/>
             </a:pPr>
             <a:r>
@@ -11283,7 +10809,7 @@
           <a:bodyPr wrap="square" lIns="0" tIns="0" rIns="0" bIns="0" rtlCol="0" anchor="ctr"/>
           <a:lstStyle/>
           <a:p>
-            <a:pPr algn="ctr" indent="0" marL="0">
+            <a:pPr marL="0" indent="0" algn="ctr">
               <a:buNone/>
             </a:pPr>
             <a:r>
@@ -11322,7 +10848,7 @@
           <a:bodyPr wrap="square" lIns="0" tIns="0" rIns="0" bIns="0" rtlCol="0" anchor="ctr"/>
           <a:lstStyle/>
           <a:p>
-            <a:pPr algn="ctr" indent="0" marL="0">
+            <a:pPr marL="0" indent="0" algn="ctr">
               <a:buNone/>
             </a:pPr>
             <a:r>
@@ -11366,7 +10892,7 @@
             <a:prstDash val="solid"/>
           </a:ln>
           <a:effectLst>
-            <a:outerShdw sx="100000" sy="100000" kx="0" ky="0" algn="bl" rotWithShape="0" blurRad="101600" dist="25400" dir="5400000">
+            <a:outerShdw blurRad="101600" dist="25400" dir="5400000" algn="bl" rotWithShape="0">
               <a:srgbClr val="14161C">
                 <a:alpha val="8000"/>
               </a:srgbClr>
@@ -11420,7 +10946,7 @@
           <a:bodyPr wrap="square" lIns="0" tIns="0" rIns="0" bIns="0" rtlCol="0" anchor="ctr"/>
           <a:lstStyle/>
           <a:p>
-            <a:pPr algn="ctr" indent="0" marL="0">
+            <a:pPr marL="0" indent="0" algn="ctr">
               <a:buNone/>
             </a:pPr>
             <a:r>
@@ -11459,7 +10985,7 @@
           <a:bodyPr wrap="square" lIns="0" tIns="0" rIns="0" bIns="0" rtlCol="0" anchor="ctr"/>
           <a:lstStyle/>
           <a:p>
-            <a:pPr algn="ctr" indent="0" marL="0">
+            <a:pPr marL="0" indent="0" algn="ctr">
               <a:buNone/>
             </a:pPr>
             <a:r>
@@ -11498,7 +11024,7 @@
           <a:bodyPr wrap="square" lIns="0" tIns="0" rIns="0" bIns="0" rtlCol="0" anchor="ctr"/>
           <a:lstStyle/>
           <a:p>
-            <a:pPr algn="ctr" indent="0" marL="0">
+            <a:pPr marL="0" indent="0" algn="ctr">
               <a:buNone/>
             </a:pPr>
             <a:r>
@@ -11542,7 +11068,7 @@
             <a:prstDash val="solid"/>
           </a:ln>
           <a:effectLst>
-            <a:outerShdw sx="100000" sy="100000" kx="0" ky="0" algn="bl" rotWithShape="0" blurRad="101600" dist="25400" dir="5400000">
+            <a:outerShdw blurRad="101600" dist="25400" dir="5400000" algn="bl" rotWithShape="0">
               <a:srgbClr val="14161C">
                 <a:alpha val="8000"/>
               </a:srgbClr>
@@ -11596,7 +11122,7 @@
           <a:bodyPr wrap="square" lIns="0" tIns="0" rIns="0" bIns="0" rtlCol="0" anchor="ctr"/>
           <a:lstStyle/>
           <a:p>
-            <a:pPr algn="ctr" indent="0" marL="0">
+            <a:pPr marL="0" indent="0" algn="ctr">
               <a:buNone/>
             </a:pPr>
             <a:r>
@@ -11635,7 +11161,7 @@
           <a:bodyPr wrap="square" lIns="0" tIns="0" rIns="0" bIns="0" rtlCol="0" anchor="ctr"/>
           <a:lstStyle/>
           <a:p>
-            <a:pPr algn="ctr" indent="0" marL="0">
+            <a:pPr marL="0" indent="0" algn="ctr">
               <a:buNone/>
             </a:pPr>
             <a:r>
@@ -11674,7 +11200,7 @@
           <a:bodyPr wrap="square" lIns="0" tIns="0" rIns="0" bIns="0" rtlCol="0" anchor="ctr"/>
           <a:lstStyle/>
           <a:p>
-            <a:pPr algn="ctr" indent="0" marL="0">
+            <a:pPr marL="0" indent="0" algn="ctr">
               <a:buNone/>
             </a:pPr>
             <a:r>
@@ -11718,7 +11244,7 @@
             <a:prstDash val="solid"/>
           </a:ln>
           <a:effectLst>
-            <a:outerShdw sx="100000" sy="100000" kx="0" ky="0" algn="bl" rotWithShape="0" blurRad="101600" dist="25400" dir="5400000">
+            <a:outerShdw blurRad="101600" dist="25400" dir="5400000" algn="bl" rotWithShape="0">
               <a:srgbClr val="14161C">
                 <a:alpha val="8000"/>
               </a:srgbClr>
@@ -11747,11 +11273,11 @@
           <a:bodyPr wrap="square" lIns="0" tIns="0" rIns="0" bIns="0" rtlCol="0" anchor="ctr"/>
           <a:lstStyle/>
           <a:p>
-            <a:pPr indent="0" marL="0">
-              <a:buNone/>
-            </a:pPr>
-            <a:r>
-              <a:rPr lang="en-US" sz="1050" b="1" spc="200" kern="0" dirty="0">
+            <a:pPr marL="0" indent="0">
+              <a:buNone/>
+            </a:pPr>
+            <a:r>
+              <a:rPr lang="en-US" sz="1050" b="1" kern="0" spc="200" dirty="0">
                 <a:solidFill>
                   <a:srgbClr val="5457E0"/>
                 </a:solidFill>
@@ -11786,7 +11312,7 @@
           <a:bodyPr wrap="square" lIns="0" tIns="0" rIns="0" bIns="0" rtlCol="0" anchor="ctr"/>
           <a:lstStyle/>
           <a:p>
-            <a:pPr indent="0" marL="0">
+            <a:pPr marL="0" indent="0">
               <a:buNone/>
             </a:pPr>
             <a:r>
@@ -11825,7 +11351,7 @@
           <a:bodyPr wrap="square" lIns="0" tIns="0" rIns="0" bIns="0" rtlCol="0" anchor="t"/>
           <a:lstStyle/>
           <a:p>
-            <a:pPr indent="0" marL="0">
+            <a:pPr marL="0" indent="0">
               <a:buNone/>
             </a:pPr>
             <a:r>
@@ -11891,7 +11417,7 @@
           <a:bodyPr wrap="square" lIns="0" tIns="0" rIns="0" bIns="0" rtlCol="0" anchor="ctr"/>
           <a:lstStyle/>
           <a:p>
-            <a:pPr algn="ctr" indent="0" marL="0">
+            <a:pPr marL="0" indent="0" algn="ctr">
               <a:buNone/>
             </a:pPr>
             <a:r>
@@ -11930,7 +11456,7 @@
           <a:bodyPr wrap="square" lIns="0" tIns="0" rIns="0" bIns="0" rtlCol="0" anchor="ctr"/>
           <a:lstStyle/>
           <a:p>
-            <a:pPr indent="0" marL="0">
+            <a:pPr marL="0" indent="0">
               <a:buNone/>
             </a:pPr>
             <a:r>
@@ -12249,4 +11775,299 @@
     </a:ext>
   </a:extLst>
 </a:theme>
+</file>
+
+<file path=ppt/theme/theme2.xml><?xml version="1.0" encoding="utf-8"?>
+<a:theme xmlns:a="http://schemas.openxmlformats.org/drawingml/2006/main" name="Office Theme">
+  <a:themeElements>
+    <a:clrScheme name="Office">
+      <a:dk1>
+        <a:sysClr val="windowText" lastClr="000000"/>
+      </a:dk1>
+      <a:lt1>
+        <a:sysClr val="window" lastClr="FFFFFF"/>
+      </a:lt1>
+      <a:dk2>
+        <a:srgbClr val="44546A"/>
+      </a:dk2>
+      <a:lt2>
+        <a:srgbClr val="E7E6E6"/>
+      </a:lt2>
+      <a:accent1>
+        <a:srgbClr val="4472C4"/>
+      </a:accent1>
+      <a:accent2>
+        <a:srgbClr val="ED7D31"/>
+      </a:accent2>
+      <a:accent3>
+        <a:srgbClr val="A5A5A5"/>
+      </a:accent3>
+      <a:accent4>
+        <a:srgbClr val="FFC000"/>
+      </a:accent4>
+      <a:accent5>
+        <a:srgbClr val="5B9BD5"/>
+      </a:accent5>
+      <a:accent6>
+        <a:srgbClr val="70AD47"/>
+      </a:accent6>
+      <a:hlink>
+        <a:srgbClr val="0563C1"/>
+      </a:hlink>
+      <a:folHlink>
+        <a:srgbClr val="954F72"/>
+      </a:folHlink>
+    </a:clrScheme>
+    <a:fontScheme name="Office">
+      <a:majorFont>
+        <a:latin typeface="Calibri Light" panose="020F0302020204030204"/>
+        <a:ea typeface=""/>
+        <a:cs typeface=""/>
+        <a:font script="Jpan" typeface="游ゴシック Light"/>
+        <a:font script="Hang" typeface="맑은 고딕"/>
+        <a:font script="Hans" typeface="等线 Light"/>
+        <a:font script="Hant" typeface="新細明體"/>
+        <a:font script="Arab" typeface="Times New Roman"/>
+        <a:font script="Hebr" typeface="Times New Roman"/>
+        <a:font script="Thai" typeface="Angsana New"/>
+        <a:font script="Ethi" typeface="Nyala"/>
+        <a:font script="Beng" typeface="Vrinda"/>
+        <a:font script="Gujr" typeface="Shruti"/>
+        <a:font script="Khmr" typeface="MoolBoran"/>
+        <a:font script="Knda" typeface="Tunga"/>
+        <a:font script="Guru" typeface="Raavi"/>
+        <a:font script="Cans" typeface="Euphemia"/>
+        <a:font script="Cher" typeface="Plantagenet Cherokee"/>
+        <a:font script="Yiii" typeface="Microsoft Yi Baiti"/>
+        <a:font script="Tibt" typeface="Microsoft Himalaya"/>
+        <a:font script="Thaa" typeface="MV Boli"/>
+        <a:font script="Deva" typeface="Mangal"/>
+        <a:font script="Telu" typeface="Gautami"/>
+        <a:font script="Taml" typeface="Latha"/>
+        <a:font script="Syrc" typeface="Estrangelo Edessa"/>
+        <a:font script="Orya" typeface="Kalinga"/>
+        <a:font script="Mlym" typeface="Kartika"/>
+        <a:font script="Laoo" typeface="DokChampa"/>
+        <a:font script="Sinh" typeface="Iskoola Pota"/>
+        <a:font script="Mong" typeface="Mongolian Baiti"/>
+        <a:font script="Viet" typeface="Times New Roman"/>
+        <a:font script="Uigh" typeface="Microsoft Uighur"/>
+        <a:font script="Geor" typeface="Sylfaen"/>
+        <a:font script="Armn" typeface="Arial"/>
+        <a:font script="Bugi" typeface="Leelawadee UI"/>
+        <a:font script="Bopo" typeface="Microsoft JhengHei"/>
+        <a:font script="Java" typeface="Javanese Text"/>
+        <a:font script="Lisu" typeface="Segoe UI"/>
+        <a:font script="Mymr" typeface="Myanmar Text"/>
+        <a:font script="Nkoo" typeface="Ebrima"/>
+        <a:font script="Olck" typeface="Nirmala UI"/>
+        <a:font script="Osma" typeface="Ebrima"/>
+        <a:font script="Phag" typeface="Phagspa"/>
+        <a:font script="Syrn" typeface="Estrangelo Edessa"/>
+        <a:font script="Syrj" typeface="Estrangelo Edessa"/>
+        <a:font script="Syre" typeface="Estrangelo Edessa"/>
+        <a:font script="Sora" typeface="Nirmala UI"/>
+        <a:font script="Tale" typeface="Microsoft Tai Le"/>
+        <a:font script="Talu" typeface="Microsoft New Tai Lue"/>
+        <a:font script="Tfng" typeface="Ebrima"/>
+      </a:majorFont>
+      <a:minorFont>
+        <a:latin typeface="Calibri" panose="020F0502020204030204"/>
+        <a:ea typeface=""/>
+        <a:cs typeface=""/>
+        <a:font script="Jpan" typeface="游ゴシック"/>
+        <a:font script="Hang" typeface="맑은 고딕"/>
+        <a:font script="Hans" typeface="等线"/>
+        <a:font script="Hant" typeface="新細明體"/>
+        <a:font script="Arab" typeface="Arial"/>
+        <a:font script="Hebr" typeface="Arial"/>
+        <a:font script="Thai" typeface="Cordia New"/>
+        <a:font script="Ethi" typeface="Nyala"/>
+        <a:font script="Beng" typeface="Vrinda"/>
+        <a:font script="Gujr" typeface="Shruti"/>
+        <a:font script="Khmr" typeface="DaunPenh"/>
+        <a:font script="Knda" typeface="Tunga"/>
+        <a:font script="Guru" typeface="Raavi"/>
+        <a:font script="Cans" typeface="Euphemia"/>
+        <a:font script="Cher" typeface="Plantagenet Cherokee"/>
+        <a:font script="Yiii" typeface="Microsoft Yi Baiti"/>
+        <a:font script="Tibt" typeface="Microsoft Himalaya"/>
+        <a:font script="Thaa" typeface="MV Boli"/>
+        <a:font script="Deva" typeface="Mangal"/>
+        <a:font script="Telu" typeface="Gautami"/>
+        <a:font script="Taml" typeface="Latha"/>
+        <a:font script="Syrc" typeface="Estrangelo Edessa"/>
+        <a:font script="Orya" typeface="Kalinga"/>
+        <a:font script="Mlym" typeface="Kartika"/>
+        <a:font script="Laoo" typeface="DokChampa"/>
+        <a:font script="Sinh" typeface="Iskoola Pota"/>
+        <a:font script="Mong" typeface="Mongolian Baiti"/>
+        <a:font script="Viet" typeface="Arial"/>
+        <a:font script="Uigh" typeface="Microsoft Uighur"/>
+        <a:font script="Geor" typeface="Sylfaen"/>
+        <a:font script="Armn" typeface="Arial"/>
+        <a:font script="Bugi" typeface="Leelawadee UI"/>
+        <a:font script="Bopo" typeface="Microsoft JhengHei"/>
+        <a:font script="Java" typeface="Javanese Text"/>
+        <a:font script="Lisu" typeface="Segoe UI"/>
+        <a:font script="Mymr" typeface="Myanmar Text"/>
+        <a:font script="Nkoo" typeface="Ebrima"/>
+        <a:font script="Olck" typeface="Nirmala UI"/>
+        <a:font script="Osma" typeface="Ebrima"/>
+        <a:font script="Phag" typeface="Phagspa"/>
+        <a:font script="Syrn" typeface="Estrangelo Edessa"/>
+        <a:font script="Syrj" typeface="Estrangelo Edessa"/>
+        <a:font script="Syre" typeface="Estrangelo Edessa"/>
+        <a:font script="Sora" typeface="Nirmala UI"/>
+        <a:font script="Tale" typeface="Microsoft Tai Le"/>
+        <a:font script="Talu" typeface="Microsoft New Tai Lue"/>
+        <a:font script="Tfng" typeface="Ebrima"/>
+      </a:minorFont>
+    </a:fontScheme>
+    <a:fmtScheme name="Office">
+      <a:fillStyleLst>
+        <a:solidFill>
+          <a:schemeClr val="phClr"/>
+        </a:solidFill>
+        <a:gradFill rotWithShape="1">
+          <a:gsLst>
+            <a:gs pos="0">
+              <a:schemeClr val="phClr">
+                <a:lumMod val="110000"/>
+                <a:satMod val="105000"/>
+                <a:tint val="67000"/>
+              </a:schemeClr>
+            </a:gs>
+            <a:gs pos="50000">
+              <a:schemeClr val="phClr">
+                <a:lumMod val="105000"/>
+                <a:satMod val="103000"/>
+                <a:tint val="73000"/>
+              </a:schemeClr>
+            </a:gs>
+            <a:gs pos="100000">
+              <a:schemeClr val="phClr">
+                <a:lumMod val="105000"/>
+                <a:satMod val="109000"/>
+                <a:tint val="81000"/>
+              </a:schemeClr>
+            </a:gs>
+          </a:gsLst>
+          <a:lin ang="5400000" scaled="0"/>
+        </a:gradFill>
+        <a:gradFill rotWithShape="1">
+          <a:gsLst>
+            <a:gs pos="0">
+              <a:schemeClr val="phClr">
+                <a:satMod val="103000"/>
+                <a:lumMod val="102000"/>
+                <a:tint val="94000"/>
+              </a:schemeClr>
+            </a:gs>
+            <a:gs pos="50000">
+              <a:schemeClr val="phClr">
+                <a:satMod val="110000"/>
+                <a:lumMod val="100000"/>
+                <a:shade val="100000"/>
+              </a:schemeClr>
+            </a:gs>
+            <a:gs pos="100000">
+              <a:schemeClr val="phClr">
+                <a:lumMod val="99000"/>
+                <a:satMod val="120000"/>
+                <a:shade val="78000"/>
+              </a:schemeClr>
+            </a:gs>
+          </a:gsLst>
+          <a:lin ang="5400000" scaled="0"/>
+        </a:gradFill>
+      </a:fillStyleLst>
+      <a:lnStyleLst>
+        <a:ln w="6350" cap="flat" cmpd="sng" algn="ctr">
+          <a:solidFill>
+            <a:schemeClr val="phClr"/>
+          </a:solidFill>
+          <a:prstDash val="solid"/>
+          <a:miter lim="800000"/>
+        </a:ln>
+        <a:ln w="12700" cap="flat" cmpd="sng" algn="ctr">
+          <a:solidFill>
+            <a:schemeClr val="phClr"/>
+          </a:solidFill>
+          <a:prstDash val="solid"/>
+          <a:miter lim="800000"/>
+        </a:ln>
+        <a:ln w="19050" cap="flat" cmpd="sng" algn="ctr">
+          <a:solidFill>
+            <a:schemeClr val="phClr"/>
+          </a:solidFill>
+          <a:prstDash val="solid"/>
+          <a:miter lim="800000"/>
+        </a:ln>
+      </a:lnStyleLst>
+      <a:effectStyleLst>
+        <a:effectStyle>
+          <a:effectLst/>
+        </a:effectStyle>
+        <a:effectStyle>
+          <a:effectLst/>
+        </a:effectStyle>
+        <a:effectStyle>
+          <a:effectLst>
+            <a:outerShdw blurRad="57150" dist="19050" dir="5400000" algn="ctr" rotWithShape="0">
+              <a:srgbClr val="000000">
+                <a:alpha val="63000"/>
+              </a:srgbClr>
+            </a:outerShdw>
+          </a:effectLst>
+        </a:effectStyle>
+      </a:effectStyleLst>
+      <a:bgFillStyleLst>
+        <a:solidFill>
+          <a:schemeClr val="phClr"/>
+        </a:solidFill>
+        <a:solidFill>
+          <a:schemeClr val="phClr">
+            <a:tint val="95000"/>
+            <a:satMod val="170000"/>
+          </a:schemeClr>
+        </a:solidFill>
+        <a:gradFill rotWithShape="1">
+          <a:gsLst>
+            <a:gs pos="0">
+              <a:schemeClr val="phClr">
+                <a:tint val="93000"/>
+                <a:satMod val="150000"/>
+                <a:shade val="98000"/>
+                <a:lumMod val="102000"/>
+              </a:schemeClr>
+            </a:gs>
+            <a:gs pos="50000">
+              <a:schemeClr val="phClr">
+                <a:tint val="98000"/>
+                <a:satMod val="130000"/>
+                <a:shade val="90000"/>
+                <a:lumMod val="103000"/>
+              </a:schemeClr>
+            </a:gs>
+            <a:gs pos="100000">
+              <a:schemeClr val="phClr">
+                <a:shade val="63000"/>
+                <a:satMod val="120000"/>
+              </a:schemeClr>
+            </a:gs>
+          </a:gsLst>
+          <a:lin ang="5400000" scaled="0"/>
+        </a:gradFill>
+      </a:bgFillStyleLst>
+    </a:fmtScheme>
+  </a:themeElements>
+  <a:objectDefaults/>
+  <a:extraClrSchemeLst/>
+  <a:extLst>
+    <a:ext uri="{05A4C25C-085E-4340-85A3-A5531E510DB2}">
+      <thm15:themeFamily xmlns:thm15="http://schemas.microsoft.com/office/thememl/2012/main" name="Office Theme" id="{62F939B6-93AF-4DB8-9C6B-D6C7DFDC589F}" vid="{4A3C46E8-61CC-4603-A589-7422A47A8E4A}"/>
+    </a:ext>
+  </a:extLst>
+</a:theme>
 </file>